--- a/Presentations/Week_7_Presentation.pptx
+++ b/Presentations/Week_7_Presentation.pptx
@@ -5,10 +5,10 @@
     <p:sldMasterId id="2147483648" r:id="rId4"/>
   </p:sldMasterIdLst>
   <p:notesMasterIdLst>
-    <p:notesMasterId r:id="rId23"/>
+    <p:notesMasterId r:id="rId24"/>
   </p:notesMasterIdLst>
   <p:handoutMasterIdLst>
-    <p:handoutMasterId r:id="rId24"/>
+    <p:handoutMasterId r:id="rId25"/>
   </p:handoutMasterIdLst>
   <p:sldIdLst>
     <p:sldId id="305" r:id="rId5"/>
@@ -18,17 +18,18 @@
     <p:sldId id="351" r:id="rId9"/>
     <p:sldId id="349" r:id="rId10"/>
     <p:sldId id="341" r:id="rId11"/>
-    <p:sldId id="342" r:id="rId12"/>
-    <p:sldId id="346" r:id="rId13"/>
-    <p:sldId id="340" r:id="rId14"/>
-    <p:sldId id="347" r:id="rId15"/>
-    <p:sldId id="344" r:id="rId16"/>
-    <p:sldId id="350" r:id="rId17"/>
-    <p:sldId id="343" r:id="rId18"/>
-    <p:sldId id="345" r:id="rId19"/>
-    <p:sldId id="331" r:id="rId20"/>
-    <p:sldId id="330" r:id="rId21"/>
-    <p:sldId id="318" r:id="rId22"/>
+    <p:sldId id="346" r:id="rId12"/>
+    <p:sldId id="340" r:id="rId13"/>
+    <p:sldId id="347" r:id="rId14"/>
+    <p:sldId id="344" r:id="rId15"/>
+    <p:sldId id="350" r:id="rId16"/>
+    <p:sldId id="353" r:id="rId17"/>
+    <p:sldId id="352" r:id="rId18"/>
+    <p:sldId id="343" r:id="rId19"/>
+    <p:sldId id="345" r:id="rId20"/>
+    <p:sldId id="331" r:id="rId21"/>
+    <p:sldId id="330" r:id="rId22"/>
+    <p:sldId id="318" r:id="rId23"/>
   </p:sldIdLst>
   <p:sldSz cx="12192000" cy="6858000"/>
   <p:notesSz cx="6858000" cy="9144000"/>
@@ -10357,8 +10358,8 @@
           </a:p>
         </p:txBody>
       </p:sp>
-      <mc:AlternateContent xmlns:mc="http://schemas.openxmlformats.org/markup-compatibility/2006">
-        <mc:Choice xmlns:p14="http://schemas.microsoft.com/office/powerpoint/2010/main" Requires="p14">
+      <mc:AlternateContent xmlns:mc="http://schemas.openxmlformats.org/markup-compatibility/2006" xmlns:p14="http://schemas.microsoft.com/office/powerpoint/2010/main">
+        <mc:Choice Requires="p14">
           <p:contentPart p14:bwMode="auto" r:id="rId2">
             <p14:nvContentPartPr>
               <p14:cNvPr id="4" name="Ink 3">
@@ -10377,7 +10378,7 @@
             </p14:xfrm>
           </p:contentPart>
         </mc:Choice>
-        <mc:Fallback>
+        <mc:Fallback xmlns="">
           <p:pic>
             <p:nvPicPr>
               <p:cNvPr id="4" name="Ink 3">
@@ -10429,156 +10430,6 @@
         <p:cNvPr id="1" name="">
           <a:extLst>
             <a:ext uri="{FF2B5EF4-FFF2-40B4-BE49-F238E27FC236}">
-              <a16:creationId xmlns:a16="http://schemas.microsoft.com/office/drawing/2014/main" id="{D71AB119-0827-0F05-F370-25FD6C3CDBFD}"/>
-            </a:ext>
-          </a:extLst>
-        </p:cNvPr>
-        <p:cNvGrpSpPr/>
-        <p:nvPr/>
-      </p:nvGrpSpPr>
-      <p:grpSpPr>
-        <a:xfrm>
-          <a:off x="0" y="0"/>
-          <a:ext cx="0" cy="0"/>
-          <a:chOff x="0" y="0"/>
-          <a:chExt cx="0" cy="0"/>
-        </a:xfrm>
-      </p:grpSpPr>
-      <p:sp>
-        <p:nvSpPr>
-          <p:cNvPr id="2" name="Title 1">
-            <a:extLst>
-              <a:ext uri="{FF2B5EF4-FFF2-40B4-BE49-F238E27FC236}">
-                <a16:creationId xmlns:a16="http://schemas.microsoft.com/office/drawing/2014/main" id="{DF76BEB7-8EA3-3C43-A53D-A5B93A75C540}"/>
-              </a:ext>
-            </a:extLst>
-          </p:cNvPr>
-          <p:cNvSpPr>
-            <a:spLocks noGrp="1"/>
-          </p:cNvSpPr>
-          <p:nvPr>
-            <p:ph type="title"/>
-          </p:nvPr>
-        </p:nvSpPr>
-        <p:spPr/>
-        <p:txBody>
-          <a:bodyPr/>
-          <a:lstStyle/>
-          <a:p>
-            <a:r>
-              <a:rPr lang="en-US" dirty="0"/>
-              <a:t>Web App</a:t>
-            </a:r>
-          </a:p>
-        </p:txBody>
-      </p:sp>
-      <p:sp>
-        <p:nvSpPr>
-          <p:cNvPr id="3" name="Content Placeholder 2">
-            <a:extLst>
-              <a:ext uri="{FF2B5EF4-FFF2-40B4-BE49-F238E27FC236}">
-                <a16:creationId xmlns:a16="http://schemas.microsoft.com/office/drawing/2014/main" id="{C6EBAF4A-430E-93B3-1CF6-790E933B6BB6}"/>
-              </a:ext>
-            </a:extLst>
-          </p:cNvPr>
-          <p:cNvSpPr>
-            <a:spLocks noGrp="1"/>
-          </p:cNvSpPr>
-          <p:nvPr>
-            <p:ph sz="quarter" idx="13"/>
-          </p:nvPr>
-        </p:nvSpPr>
-        <p:spPr>
-          <a:xfrm>
-            <a:off x="841248" y="1536827"/>
-            <a:ext cx="10076688" cy="4479925"/>
-          </a:xfrm>
-        </p:spPr>
-        <p:txBody>
-          <a:bodyPr/>
-          <a:lstStyle/>
-          <a:p>
-            <a:r>
-              <a:rPr lang="en-US" dirty="0"/>
-              <a:t>Choosing browser based for best portability</a:t>
-            </a:r>
-          </a:p>
-          <a:p>
-            <a:r>
-              <a:rPr lang="en-US" dirty="0"/>
-              <a:t>Using </a:t>
-            </a:r>
-            <a:r>
-              <a:rPr lang="en-US" dirty="0" err="1"/>
-              <a:t>webbluetooth</a:t>
-            </a:r>
-            <a:r>
-              <a:rPr lang="en-US" dirty="0"/>
-              <a:t> with JS</a:t>
-            </a:r>
-          </a:p>
-          <a:p>
-            <a:r>
-              <a:rPr lang="en-US" dirty="0"/>
-              <a:t>Need room to expand easily to more channels</a:t>
-            </a:r>
-          </a:p>
-          <a:p>
-            <a:endParaRPr lang="en-US" dirty="0"/>
-          </a:p>
-        </p:txBody>
-      </p:sp>
-      <p:sp>
-        <p:nvSpPr>
-          <p:cNvPr id="4" name="Slide Number Placeholder 3">
-            <a:extLst>
-              <a:ext uri="{FF2B5EF4-FFF2-40B4-BE49-F238E27FC236}">
-                <a16:creationId xmlns:a16="http://schemas.microsoft.com/office/drawing/2014/main" id="{4B6E13FE-EA4D-8BE9-A86E-14F92820A72A}"/>
-              </a:ext>
-            </a:extLst>
-          </p:cNvPr>
-          <p:cNvSpPr>
-            <a:spLocks noGrp="1"/>
-          </p:cNvSpPr>
-          <p:nvPr>
-            <p:ph type="sldNum" sz="quarter" idx="11"/>
-          </p:nvPr>
-        </p:nvSpPr>
-        <p:spPr/>
-        <p:txBody>
-          <a:bodyPr/>
-          <a:lstStyle/>
-          <a:p>
-            <a:fld id="{B67B645E-C5E5-4727-B977-D372A0AA71D9}" type="slidenum">
-              <a:rPr lang="en-US" smtClean="0"/>
-              <a:pPr/>
-              <a:t>10</a:t>
-            </a:fld>
-            <a:endParaRPr lang="en-US" dirty="0"/>
-          </a:p>
-        </p:txBody>
-      </p:sp>
-    </p:spTree>
-    <p:extLst>
-      <p:ext uri="{BB962C8B-B14F-4D97-AF65-F5344CB8AC3E}">
-        <p14:creationId xmlns:p14="http://schemas.microsoft.com/office/powerpoint/2010/main" val="120760822"/>
-      </p:ext>
-    </p:extLst>
-  </p:cSld>
-  <p:clrMapOvr>
-    <a:masterClrMapping/>
-  </p:clrMapOvr>
-</p:sld>
-</file>
-
-<file path=ppt/slides/slide11.xml><?xml version="1.0" encoding="utf-8"?>
-<p:sld xmlns:a="http://schemas.openxmlformats.org/drawingml/2006/main" xmlns:r="http://schemas.openxmlformats.org/officeDocument/2006/relationships" xmlns:p="http://schemas.openxmlformats.org/presentationml/2006/main">
-  <p:cSld>
-    <p:spTree>
-      <p:nvGrpSpPr>
-        <p:cNvPr id="1" name="">
-          <a:extLst>
-            <a:ext uri="{FF2B5EF4-FFF2-40B4-BE49-F238E27FC236}">
               <a16:creationId xmlns:a16="http://schemas.microsoft.com/office/drawing/2014/main" id="{1CC0C048-7E81-9819-0A16-41657E4EFF4C}"/>
             </a:ext>
           </a:extLst>
@@ -10691,7 +10542,7 @@
             <a:fld id="{B67B645E-C5E5-4727-B977-D372A0AA71D9}" type="slidenum">
               <a:rPr lang="en-US" smtClean="0"/>
               <a:pPr/>
-              <a:t>11</a:t>
+              <a:t>10</a:t>
             </a:fld>
             <a:endParaRPr lang="en-US" dirty="0"/>
           </a:p>
@@ -10710,7 +10561,7 @@
 </p:sld>
 </file>
 
-<file path=ppt/slides/slide12.xml><?xml version="1.0" encoding="utf-8"?>
+<file path=ppt/slides/slide11.xml><?xml version="1.0" encoding="utf-8"?>
 <p:sld xmlns:a="http://schemas.openxmlformats.org/drawingml/2006/main" xmlns:r="http://schemas.openxmlformats.org/officeDocument/2006/relationships" xmlns:p="http://schemas.openxmlformats.org/presentationml/2006/main">
   <p:cSld>
     <p:spTree>
@@ -10785,7 +10636,7 @@
             <a:fld id="{B67B645E-C5E5-4727-B977-D372A0AA71D9}" type="slidenum">
               <a:rPr lang="en-US" smtClean="0"/>
               <a:pPr/>
-              <a:t>12</a:t>
+              <a:t>11</a:t>
             </a:fld>
             <a:endParaRPr lang="en-US" dirty="0"/>
           </a:p>
@@ -10872,7 +10723,7 @@
 </p:sld>
 </file>
 
-<file path=ppt/slides/slide13.xml><?xml version="1.0" encoding="utf-8"?>
+<file path=ppt/slides/slide12.xml><?xml version="1.0" encoding="utf-8"?>
 <p:sld xmlns:a="http://schemas.openxmlformats.org/drawingml/2006/main" xmlns:r="http://schemas.openxmlformats.org/officeDocument/2006/relationships" xmlns:p="http://schemas.openxmlformats.org/presentationml/2006/main">
   <p:cSld>
     <p:spTree>
@@ -10941,7 +10792,7 @@
             <a:fld id="{B67B645E-C5E5-4727-B977-D372A0AA71D9}" type="slidenum">
               <a:rPr lang="en-US" smtClean="0"/>
               <a:pPr/>
-              <a:t>13</a:t>
+              <a:t>12</a:t>
             </a:fld>
             <a:endParaRPr lang="en-US" dirty="0"/>
           </a:p>
@@ -11020,7 +10871,468 @@
 </p:sld>
 </file>
 
+<file path=ppt/slides/slide13.xml><?xml version="1.0" encoding="utf-8"?>
+<p:sld xmlns:a="http://schemas.openxmlformats.org/drawingml/2006/main" xmlns:r="http://schemas.openxmlformats.org/officeDocument/2006/relationships" xmlns:p="http://schemas.openxmlformats.org/presentationml/2006/main">
+  <p:cSld>
+    <p:spTree>
+      <p:nvGrpSpPr>
+        <p:cNvPr id="1" name=""/>
+        <p:cNvGrpSpPr/>
+        <p:nvPr/>
+      </p:nvGrpSpPr>
+      <p:grpSpPr>
+        <a:xfrm>
+          <a:off x="0" y="0"/>
+          <a:ext cx="0" cy="0"/>
+          <a:chOff x="0" y="0"/>
+          <a:chExt cx="0" cy="0"/>
+        </a:xfrm>
+      </p:grpSpPr>
+      <p:sp>
+        <p:nvSpPr>
+          <p:cNvPr id="2" name="Title 1">
+            <a:extLst>
+              <a:ext uri="{FF2B5EF4-FFF2-40B4-BE49-F238E27FC236}">
+                <a16:creationId xmlns:a16="http://schemas.microsoft.com/office/drawing/2014/main" id="{90390BD1-105D-F6BA-2EA3-D9B3277C2E50}"/>
+              </a:ext>
+            </a:extLst>
+          </p:cNvPr>
+          <p:cNvSpPr>
+            <a:spLocks noGrp="1"/>
+          </p:cNvSpPr>
+          <p:nvPr>
+            <p:ph type="title"/>
+          </p:nvPr>
+        </p:nvSpPr>
+        <p:spPr>
+          <a:xfrm>
+            <a:off x="740664" y="472577"/>
+            <a:ext cx="10479024" cy="557784"/>
+          </a:xfrm>
+        </p:spPr>
+        <p:txBody>
+          <a:bodyPr/>
+          <a:lstStyle/>
+          <a:p>
+            <a:r>
+              <a:rPr lang="en-US" dirty="0"/>
+              <a:t>Writes to two channels</a:t>
+            </a:r>
+          </a:p>
+        </p:txBody>
+      </p:sp>
+      <p:pic>
+        <p:nvPicPr>
+          <p:cNvPr id="6" name="Content Placeholder 5">
+            <a:extLst>
+              <a:ext uri="{FF2B5EF4-FFF2-40B4-BE49-F238E27FC236}">
+                <a16:creationId xmlns:a16="http://schemas.microsoft.com/office/drawing/2014/main" id="{049BA01E-A295-356F-4918-76AFB9344FCF}"/>
+              </a:ext>
+            </a:extLst>
+          </p:cNvPr>
+          <p:cNvPicPr>
+            <a:picLocks noGrp="1" noChangeAspect="1"/>
+          </p:cNvPicPr>
+          <p:nvPr>
+            <p:ph sz="quarter" idx="13"/>
+          </p:nvPr>
+        </p:nvPicPr>
+        <p:blipFill>
+          <a:blip r:embed="rId2"/>
+          <a:srcRect l="28081" r="27613"/>
+          <a:stretch>
+            <a:fillRect/>
+          </a:stretch>
+        </p:blipFill>
+        <p:spPr>
+          <a:xfrm>
+            <a:off x="569763" y="1426464"/>
+            <a:ext cx="3017519" cy="4584113"/>
+          </a:xfrm>
+        </p:spPr>
+      </p:pic>
+      <p:sp>
+        <p:nvSpPr>
+          <p:cNvPr id="4" name="Slide Number Placeholder 3">
+            <a:extLst>
+              <a:ext uri="{FF2B5EF4-FFF2-40B4-BE49-F238E27FC236}">
+                <a16:creationId xmlns:a16="http://schemas.microsoft.com/office/drawing/2014/main" id="{16C4BBF1-9E09-57D2-A47D-19B483BB1D35}"/>
+              </a:ext>
+            </a:extLst>
+          </p:cNvPr>
+          <p:cNvSpPr>
+            <a:spLocks noGrp="1"/>
+          </p:cNvSpPr>
+          <p:nvPr>
+            <p:ph type="sldNum" sz="quarter" idx="11"/>
+          </p:nvPr>
+        </p:nvSpPr>
+        <p:spPr/>
+        <p:txBody>
+          <a:bodyPr/>
+          <a:lstStyle/>
+          <a:p>
+            <a:fld id="{B67B645E-C5E5-4727-B977-D372A0AA71D9}" type="slidenum">
+              <a:rPr lang="en-US" smtClean="0"/>
+              <a:pPr/>
+              <a:t>13</a:t>
+            </a:fld>
+            <a:endParaRPr lang="en-US" dirty="0"/>
+          </a:p>
+        </p:txBody>
+      </p:sp>
+      <p:pic>
+        <p:nvPicPr>
+          <p:cNvPr id="8" name="Picture 7">
+            <a:extLst>
+              <a:ext uri="{FF2B5EF4-FFF2-40B4-BE49-F238E27FC236}">
+                <a16:creationId xmlns:a16="http://schemas.microsoft.com/office/drawing/2014/main" id="{A8C885C6-1259-1EDD-CF24-4EB7B48BAA54}"/>
+              </a:ext>
+            </a:extLst>
+          </p:cNvPr>
+          <p:cNvPicPr>
+            <a:picLocks noChangeAspect="1"/>
+          </p:cNvPicPr>
+          <p:nvPr/>
+        </p:nvPicPr>
+        <p:blipFill>
+          <a:blip r:embed="rId3"/>
+          <a:stretch>
+            <a:fillRect/>
+          </a:stretch>
+        </p:blipFill>
+        <p:spPr>
+          <a:xfrm>
+            <a:off x="4416125" y="1617402"/>
+            <a:ext cx="7345075" cy="3623195"/>
+          </a:xfrm>
+          <a:prstGeom prst="rect">
+            <a:avLst/>
+          </a:prstGeom>
+        </p:spPr>
+      </p:pic>
+      <p:sp>
+        <p:nvSpPr>
+          <p:cNvPr id="11" name="Oval 10">
+            <a:extLst>
+              <a:ext uri="{FF2B5EF4-FFF2-40B4-BE49-F238E27FC236}">
+                <a16:creationId xmlns:a16="http://schemas.microsoft.com/office/drawing/2014/main" id="{7587ECF6-6E0E-101F-BE62-D3A0520E1A8D}"/>
+              </a:ext>
+            </a:extLst>
+          </p:cNvPr>
+          <p:cNvSpPr/>
+          <p:nvPr/>
+        </p:nvSpPr>
+        <p:spPr>
+          <a:xfrm>
+            <a:off x="1534454" y="4719633"/>
+            <a:ext cx="1088136" cy="228600"/>
+          </a:xfrm>
+          <a:prstGeom prst="ellipse">
+            <a:avLst/>
+          </a:prstGeom>
+          <a:noFill/>
+          <a:ln>
+            <a:solidFill>
+              <a:srgbClr val="FF0000"/>
+            </a:solidFill>
+          </a:ln>
+          <a:effectLst>
+            <a:outerShdw blurRad="330200" dist="304800" dir="5400000" algn="t" rotWithShape="0">
+              <a:prstClr val="black">
+                <a:alpha val="39000"/>
+              </a:prstClr>
+            </a:outerShdw>
+          </a:effectLst>
+        </p:spPr>
+        <p:style>
+          <a:lnRef idx="2">
+            <a:schemeClr val="accent1">
+              <a:shade val="50000"/>
+            </a:schemeClr>
+          </a:lnRef>
+          <a:fillRef idx="1">
+            <a:schemeClr val="accent1"/>
+          </a:fillRef>
+          <a:effectRef idx="0">
+            <a:schemeClr val="accent1"/>
+          </a:effectRef>
+          <a:fontRef idx="minor">
+            <a:schemeClr val="lt1"/>
+          </a:fontRef>
+        </p:style>
+        <p:txBody>
+          <a:bodyPr rtlCol="0" anchor="ctr"/>
+          <a:lstStyle/>
+          <a:p>
+            <a:pPr algn="ctr"/>
+            <a:endParaRPr lang="en-US" dirty="0">
+              <a:solidFill>
+                <a:schemeClr val="lt1"/>
+              </a:solidFill>
+            </a:endParaRPr>
+          </a:p>
+        </p:txBody>
+      </p:sp>
+      <p:sp>
+        <p:nvSpPr>
+          <p:cNvPr id="12" name="Oval 11">
+            <a:extLst>
+              <a:ext uri="{FF2B5EF4-FFF2-40B4-BE49-F238E27FC236}">
+                <a16:creationId xmlns:a16="http://schemas.microsoft.com/office/drawing/2014/main" id="{EFE75CD2-F617-D968-3E5E-F534E54CA6D2}"/>
+              </a:ext>
+            </a:extLst>
+          </p:cNvPr>
+          <p:cNvSpPr/>
+          <p:nvPr/>
+        </p:nvSpPr>
+        <p:spPr>
+          <a:xfrm>
+            <a:off x="1534454" y="3843470"/>
+            <a:ext cx="1088136" cy="228600"/>
+          </a:xfrm>
+          <a:prstGeom prst="ellipse">
+            <a:avLst/>
+          </a:prstGeom>
+          <a:noFill/>
+          <a:ln>
+            <a:solidFill>
+              <a:srgbClr val="FF0000"/>
+            </a:solidFill>
+          </a:ln>
+          <a:effectLst>
+            <a:outerShdw blurRad="330200" dist="304800" dir="5400000" algn="t" rotWithShape="0">
+              <a:prstClr val="black">
+                <a:alpha val="39000"/>
+              </a:prstClr>
+            </a:outerShdw>
+          </a:effectLst>
+        </p:spPr>
+        <p:style>
+          <a:lnRef idx="2">
+            <a:schemeClr val="accent1">
+              <a:shade val="50000"/>
+            </a:schemeClr>
+          </a:lnRef>
+          <a:fillRef idx="1">
+            <a:schemeClr val="accent1"/>
+          </a:fillRef>
+          <a:effectRef idx="0">
+            <a:schemeClr val="accent1"/>
+          </a:effectRef>
+          <a:fontRef idx="minor">
+            <a:schemeClr val="lt1"/>
+          </a:fontRef>
+        </p:style>
+        <p:txBody>
+          <a:bodyPr rtlCol="0" anchor="ctr"/>
+          <a:lstStyle/>
+          <a:p>
+            <a:pPr algn="ctr"/>
+            <a:endParaRPr lang="en-US" dirty="0">
+              <a:solidFill>
+                <a:schemeClr val="lt1"/>
+              </a:solidFill>
+            </a:endParaRPr>
+          </a:p>
+        </p:txBody>
+      </p:sp>
+    </p:spTree>
+    <p:extLst>
+      <p:ext uri="{BB962C8B-B14F-4D97-AF65-F5344CB8AC3E}">
+        <p14:creationId xmlns:p14="http://schemas.microsoft.com/office/powerpoint/2010/main" val="1111238120"/>
+      </p:ext>
+    </p:extLst>
+  </p:cSld>
+  <p:clrMapOvr>
+    <a:masterClrMapping/>
+  </p:clrMapOvr>
+</p:sld>
+</file>
+
 <file path=ppt/slides/slide14.xml><?xml version="1.0" encoding="utf-8"?>
+<p:sld xmlns:a="http://schemas.openxmlformats.org/drawingml/2006/main" xmlns:r="http://schemas.openxmlformats.org/officeDocument/2006/relationships" xmlns:p="http://schemas.openxmlformats.org/presentationml/2006/main">
+  <p:cSld>
+    <p:spTree>
+      <p:nvGrpSpPr>
+        <p:cNvPr id="1" name=""/>
+        <p:cNvGrpSpPr/>
+        <p:nvPr/>
+      </p:nvGrpSpPr>
+      <p:grpSpPr>
+        <a:xfrm>
+          <a:off x="0" y="0"/>
+          <a:ext cx="0" cy="0"/>
+          <a:chOff x="0" y="0"/>
+          <a:chExt cx="0" cy="0"/>
+        </a:xfrm>
+      </p:grpSpPr>
+      <p:sp>
+        <p:nvSpPr>
+          <p:cNvPr id="2" name="Title 1">
+            <a:extLst>
+              <a:ext uri="{FF2B5EF4-FFF2-40B4-BE49-F238E27FC236}">
+                <a16:creationId xmlns:a16="http://schemas.microsoft.com/office/drawing/2014/main" id="{EBF015E8-CED6-EC5D-1E25-10BE8CAC23BE}"/>
+              </a:ext>
+            </a:extLst>
+          </p:cNvPr>
+          <p:cNvSpPr>
+            <a:spLocks noGrp="1"/>
+          </p:cNvSpPr>
+          <p:nvPr>
+            <p:ph type="title"/>
+          </p:nvPr>
+        </p:nvSpPr>
+        <p:spPr>
+          <a:xfrm>
+            <a:off x="530352" y="456876"/>
+            <a:ext cx="10479024" cy="557784"/>
+          </a:xfrm>
+        </p:spPr>
+        <p:txBody>
+          <a:bodyPr/>
+          <a:lstStyle/>
+          <a:p>
+            <a:r>
+              <a:rPr lang="en-US" dirty="0"/>
+              <a:t>RPI Backend</a:t>
+            </a:r>
+          </a:p>
+        </p:txBody>
+      </p:sp>
+      <p:pic>
+        <p:nvPicPr>
+          <p:cNvPr id="6" name="Content Placeholder 5">
+            <a:extLst>
+              <a:ext uri="{FF2B5EF4-FFF2-40B4-BE49-F238E27FC236}">
+                <a16:creationId xmlns:a16="http://schemas.microsoft.com/office/drawing/2014/main" id="{C265993F-8B71-A7F5-92D1-26685993027E}"/>
+              </a:ext>
+            </a:extLst>
+          </p:cNvPr>
+          <p:cNvPicPr>
+            <a:picLocks noGrp="1" noChangeAspect="1"/>
+          </p:cNvPicPr>
+          <p:nvPr>
+            <p:ph sz="quarter" idx="13"/>
+          </p:nvPr>
+        </p:nvPicPr>
+        <p:blipFill>
+          <a:blip r:embed="rId2"/>
+          <a:stretch>
+            <a:fillRect/>
+          </a:stretch>
+        </p:blipFill>
+        <p:spPr>
+          <a:xfrm>
+            <a:off x="6166895" y="2363037"/>
+            <a:ext cx="5172673" cy="4166385"/>
+          </a:xfrm>
+        </p:spPr>
+      </p:pic>
+      <p:sp>
+        <p:nvSpPr>
+          <p:cNvPr id="4" name="Slide Number Placeholder 3">
+            <a:extLst>
+              <a:ext uri="{FF2B5EF4-FFF2-40B4-BE49-F238E27FC236}">
+                <a16:creationId xmlns:a16="http://schemas.microsoft.com/office/drawing/2014/main" id="{1114E81A-3EE8-369E-1622-7C953DA18277}"/>
+              </a:ext>
+            </a:extLst>
+          </p:cNvPr>
+          <p:cNvSpPr>
+            <a:spLocks noGrp="1"/>
+          </p:cNvSpPr>
+          <p:nvPr>
+            <p:ph type="sldNum" sz="quarter" idx="11"/>
+          </p:nvPr>
+        </p:nvSpPr>
+        <p:spPr/>
+        <p:txBody>
+          <a:bodyPr/>
+          <a:lstStyle/>
+          <a:p>
+            <a:fld id="{B67B645E-C5E5-4727-B977-D372A0AA71D9}" type="slidenum">
+              <a:rPr lang="en-US" smtClean="0"/>
+              <a:pPr/>
+              <a:t>14</a:t>
+            </a:fld>
+            <a:endParaRPr lang="en-US" dirty="0"/>
+          </a:p>
+        </p:txBody>
+      </p:sp>
+      <p:pic>
+        <p:nvPicPr>
+          <p:cNvPr id="8" name="Picture 7">
+            <a:extLst>
+              <a:ext uri="{FF2B5EF4-FFF2-40B4-BE49-F238E27FC236}">
+                <a16:creationId xmlns:a16="http://schemas.microsoft.com/office/drawing/2014/main" id="{510F0C61-2416-AD0A-A243-B3A53826868F}"/>
+              </a:ext>
+            </a:extLst>
+          </p:cNvPr>
+          <p:cNvPicPr>
+            <a:picLocks noChangeAspect="1"/>
+          </p:cNvPicPr>
+          <p:nvPr/>
+        </p:nvPicPr>
+        <p:blipFill>
+          <a:blip r:embed="rId3"/>
+          <a:stretch>
+            <a:fillRect/>
+          </a:stretch>
+        </p:blipFill>
+        <p:spPr>
+          <a:xfrm>
+            <a:off x="224062" y="1202608"/>
+            <a:ext cx="5082506" cy="4917397"/>
+          </a:xfrm>
+          <a:prstGeom prst="rect">
+            <a:avLst/>
+          </a:prstGeom>
+        </p:spPr>
+      </p:pic>
+      <p:pic>
+        <p:nvPicPr>
+          <p:cNvPr id="10" name="Picture 9">
+            <a:extLst>
+              <a:ext uri="{FF2B5EF4-FFF2-40B4-BE49-F238E27FC236}">
+                <a16:creationId xmlns:a16="http://schemas.microsoft.com/office/drawing/2014/main" id="{D16DEF7C-40A0-6DBA-3898-38B5FBFBCCFC}"/>
+              </a:ext>
+            </a:extLst>
+          </p:cNvPr>
+          <p:cNvPicPr>
+            <a:picLocks noChangeAspect="1"/>
+          </p:cNvPicPr>
+          <p:nvPr/>
+        </p:nvPicPr>
+        <p:blipFill>
+          <a:blip r:embed="rId4"/>
+          <a:stretch>
+            <a:fillRect/>
+          </a:stretch>
+        </p:blipFill>
+        <p:spPr>
+          <a:xfrm>
+            <a:off x="6702111" y="65190"/>
+            <a:ext cx="3704351" cy="2109899"/>
+          </a:xfrm>
+          <a:prstGeom prst="rect">
+            <a:avLst/>
+          </a:prstGeom>
+        </p:spPr>
+      </p:pic>
+    </p:spTree>
+    <p:extLst>
+      <p:ext uri="{BB962C8B-B14F-4D97-AF65-F5344CB8AC3E}">
+        <p14:creationId xmlns:p14="http://schemas.microsoft.com/office/powerpoint/2010/main" val="1289615590"/>
+      </p:ext>
+    </p:extLst>
+  </p:cSld>
+  <p:clrMapOvr>
+    <a:masterClrMapping/>
+  </p:clrMapOvr>
+</p:sld>
+</file>
+
+<file path=ppt/slides/slide15.xml><?xml version="1.0" encoding="utf-8"?>
 <p:sld xmlns:a="http://schemas.openxmlformats.org/drawingml/2006/main" xmlns:r="http://schemas.openxmlformats.org/officeDocument/2006/relationships" xmlns:p="http://schemas.openxmlformats.org/presentationml/2006/main">
   <p:cSld>
     <p:spTree>
@@ -11140,7 +11452,7 @@
             <a:fld id="{B67B645E-C5E5-4727-B977-D372A0AA71D9}" type="slidenum">
               <a:rPr lang="en-US" smtClean="0"/>
               <a:pPr/>
-              <a:t>14</a:t>
+              <a:t>15</a:t>
             </a:fld>
             <a:endParaRPr lang="en-US" dirty="0"/>
           </a:p>
@@ -11159,7 +11471,7 @@
 </p:sld>
 </file>
 
-<file path=ppt/slides/slide15.xml><?xml version="1.0" encoding="utf-8"?>
+<file path=ppt/slides/slide16.xml><?xml version="1.0" encoding="utf-8"?>
 <p:sld xmlns:a="http://schemas.openxmlformats.org/drawingml/2006/main" xmlns:r="http://schemas.openxmlformats.org/officeDocument/2006/relationships" xmlns:p="http://schemas.openxmlformats.org/presentationml/2006/main">
   <p:cSld>
     <p:spTree>
@@ -11267,7 +11579,7 @@
             <a:fld id="{B67B645E-C5E5-4727-B977-D372A0AA71D9}" type="slidenum">
               <a:rPr lang="en-US" smtClean="0"/>
               <a:pPr/>
-              <a:t>15</a:t>
+              <a:t>16</a:t>
             </a:fld>
             <a:endParaRPr lang="en-US" dirty="0"/>
           </a:p>
@@ -11316,153 +11628,6 @@
 </p:sld>
 </file>
 
-<file path=ppt/slides/slide16.xml><?xml version="1.0" encoding="utf-8"?>
-<p:sld xmlns:a="http://schemas.openxmlformats.org/drawingml/2006/main" xmlns:r="http://schemas.openxmlformats.org/officeDocument/2006/relationships" xmlns:p="http://schemas.openxmlformats.org/presentationml/2006/main">
-  <p:cSld>
-    <p:spTree>
-      <p:nvGrpSpPr>
-        <p:cNvPr id="1" name=""/>
-        <p:cNvGrpSpPr/>
-        <p:nvPr/>
-      </p:nvGrpSpPr>
-      <p:grpSpPr>
-        <a:xfrm>
-          <a:off x="0" y="0"/>
-          <a:ext cx="0" cy="0"/>
-          <a:chOff x="0" y="0"/>
-          <a:chExt cx="0" cy="0"/>
-        </a:xfrm>
-      </p:grpSpPr>
-      <p:sp>
-        <p:nvSpPr>
-          <p:cNvPr id="2" name="Title 1">
-            <a:extLst>
-              <a:ext uri="{FF2B5EF4-FFF2-40B4-BE49-F238E27FC236}">
-                <a16:creationId xmlns:a16="http://schemas.microsoft.com/office/drawing/2014/main" id="{A77F160B-AF27-B7B9-795A-6950EC477D75}"/>
-              </a:ext>
-            </a:extLst>
-          </p:cNvPr>
-          <p:cNvSpPr>
-            <a:spLocks noGrp="1"/>
-          </p:cNvSpPr>
-          <p:nvPr>
-            <p:ph type="title"/>
-          </p:nvPr>
-        </p:nvSpPr>
-        <p:spPr/>
-        <p:txBody>
-          <a:bodyPr/>
-          <a:lstStyle/>
-          <a:p>
-            <a:r>
-              <a:rPr lang="en-US" dirty="0"/>
-              <a:t>Challenges so far</a:t>
-            </a:r>
-          </a:p>
-        </p:txBody>
-      </p:sp>
-      <p:sp>
-        <p:nvSpPr>
-          <p:cNvPr id="3" name="Content Placeholder 2">
-            <a:extLst>
-              <a:ext uri="{FF2B5EF4-FFF2-40B4-BE49-F238E27FC236}">
-                <a16:creationId xmlns:a16="http://schemas.microsoft.com/office/drawing/2014/main" id="{D51F76C4-2D7C-3DF9-F61F-30FCC2A901ED}"/>
-              </a:ext>
-            </a:extLst>
-          </p:cNvPr>
-          <p:cNvSpPr>
-            <a:spLocks noGrp="1"/>
-          </p:cNvSpPr>
-          <p:nvPr>
-            <p:ph sz="quarter" idx="13"/>
-          </p:nvPr>
-        </p:nvSpPr>
-        <p:spPr>
-          <a:xfrm>
-            <a:off x="841248" y="1536827"/>
-            <a:ext cx="10076688" cy="4479925"/>
-          </a:xfrm>
-        </p:spPr>
-        <p:txBody>
-          <a:bodyPr/>
-          <a:lstStyle/>
-          <a:p>
-            <a:r>
-              <a:rPr lang="en-US" dirty="0"/>
-              <a:t>Height limit with isolation transformers</a:t>
-            </a:r>
-          </a:p>
-          <a:p>
-            <a:r>
-              <a:rPr lang="en-US" dirty="0"/>
-              <a:t>Amplifier sourcing/creation</a:t>
-            </a:r>
-          </a:p>
-          <a:p>
-            <a:r>
-              <a:rPr lang="en-US" dirty="0"/>
-              <a:t>Web app connection</a:t>
-            </a:r>
-          </a:p>
-          <a:p>
-            <a:r>
-              <a:rPr lang="en-US" dirty="0"/>
-              <a:t>DDS </a:t>
-            </a:r>
-            <a:r>
-              <a:rPr lang="en-US" dirty="0" err="1"/>
-              <a:t>Verificaiton</a:t>
-            </a:r>
-            <a:endParaRPr lang="en-US" dirty="0"/>
-          </a:p>
-          <a:p>
-            <a:endParaRPr lang="en-US" dirty="0"/>
-          </a:p>
-        </p:txBody>
-      </p:sp>
-      <p:sp>
-        <p:nvSpPr>
-          <p:cNvPr id="4" name="Slide Number Placeholder 3">
-            <a:extLst>
-              <a:ext uri="{FF2B5EF4-FFF2-40B4-BE49-F238E27FC236}">
-                <a16:creationId xmlns:a16="http://schemas.microsoft.com/office/drawing/2014/main" id="{8DC54A4F-408F-2AE8-E17D-8D70EF316CD6}"/>
-              </a:ext>
-            </a:extLst>
-          </p:cNvPr>
-          <p:cNvSpPr>
-            <a:spLocks noGrp="1"/>
-          </p:cNvSpPr>
-          <p:nvPr>
-            <p:ph type="sldNum" sz="quarter" idx="11"/>
-          </p:nvPr>
-        </p:nvSpPr>
-        <p:spPr/>
-        <p:txBody>
-          <a:bodyPr/>
-          <a:lstStyle/>
-          <a:p>
-            <a:fld id="{B67B645E-C5E5-4727-B977-D372A0AA71D9}" type="slidenum">
-              <a:rPr lang="en-US" smtClean="0"/>
-              <a:pPr/>
-              <a:t>16</a:t>
-            </a:fld>
-            <a:endParaRPr lang="en-US" dirty="0"/>
-          </a:p>
-        </p:txBody>
-      </p:sp>
-    </p:spTree>
-    <p:extLst>
-      <p:ext uri="{BB962C8B-B14F-4D97-AF65-F5344CB8AC3E}">
-        <p14:creationId xmlns:p14="http://schemas.microsoft.com/office/powerpoint/2010/main" val="1809417748"/>
-      </p:ext>
-    </p:extLst>
-  </p:cSld>
-  <p:clrMapOvr>
-    <a:masterClrMapping/>
-  </p:clrMapOvr>
-</p:sld>
-</file>
-
 <file path=ppt/slides/slide17.xml><?xml version="1.0" encoding="utf-8"?>
 <p:sld xmlns:a="http://schemas.openxmlformats.org/drawingml/2006/main" xmlns:r="http://schemas.openxmlformats.org/officeDocument/2006/relationships" xmlns:p="http://schemas.openxmlformats.org/presentationml/2006/main">
   <p:cSld>
@@ -11485,6 +11650,153 @@
           <p:cNvPr id="2" name="Title 1">
             <a:extLst>
               <a:ext uri="{FF2B5EF4-FFF2-40B4-BE49-F238E27FC236}">
+                <a16:creationId xmlns:a16="http://schemas.microsoft.com/office/drawing/2014/main" id="{A77F160B-AF27-B7B9-795A-6950EC477D75}"/>
+              </a:ext>
+            </a:extLst>
+          </p:cNvPr>
+          <p:cNvSpPr>
+            <a:spLocks noGrp="1"/>
+          </p:cNvSpPr>
+          <p:nvPr>
+            <p:ph type="title"/>
+          </p:nvPr>
+        </p:nvSpPr>
+        <p:spPr/>
+        <p:txBody>
+          <a:bodyPr/>
+          <a:lstStyle/>
+          <a:p>
+            <a:r>
+              <a:rPr lang="en-US" dirty="0"/>
+              <a:t>Challenges so far</a:t>
+            </a:r>
+          </a:p>
+        </p:txBody>
+      </p:sp>
+      <p:sp>
+        <p:nvSpPr>
+          <p:cNvPr id="3" name="Content Placeholder 2">
+            <a:extLst>
+              <a:ext uri="{FF2B5EF4-FFF2-40B4-BE49-F238E27FC236}">
+                <a16:creationId xmlns:a16="http://schemas.microsoft.com/office/drawing/2014/main" id="{D51F76C4-2D7C-3DF9-F61F-30FCC2A901ED}"/>
+              </a:ext>
+            </a:extLst>
+          </p:cNvPr>
+          <p:cNvSpPr>
+            <a:spLocks noGrp="1"/>
+          </p:cNvSpPr>
+          <p:nvPr>
+            <p:ph sz="quarter" idx="13"/>
+          </p:nvPr>
+        </p:nvSpPr>
+        <p:spPr>
+          <a:xfrm>
+            <a:off x="841248" y="1536827"/>
+            <a:ext cx="10076688" cy="4479925"/>
+          </a:xfrm>
+        </p:spPr>
+        <p:txBody>
+          <a:bodyPr/>
+          <a:lstStyle/>
+          <a:p>
+            <a:r>
+              <a:rPr lang="en-US" dirty="0"/>
+              <a:t>Height limit with isolation transformers</a:t>
+            </a:r>
+          </a:p>
+          <a:p>
+            <a:r>
+              <a:rPr lang="en-US" dirty="0"/>
+              <a:t>Amplifier sourcing/creation</a:t>
+            </a:r>
+          </a:p>
+          <a:p>
+            <a:r>
+              <a:rPr lang="en-US" dirty="0"/>
+              <a:t>Web app connection</a:t>
+            </a:r>
+          </a:p>
+          <a:p>
+            <a:r>
+              <a:rPr lang="en-US" dirty="0"/>
+              <a:t>DDS </a:t>
+            </a:r>
+            <a:r>
+              <a:rPr lang="en-US" dirty="0" err="1"/>
+              <a:t>Verificaiton</a:t>
+            </a:r>
+            <a:endParaRPr lang="en-US" dirty="0"/>
+          </a:p>
+          <a:p>
+            <a:endParaRPr lang="en-US" dirty="0"/>
+          </a:p>
+        </p:txBody>
+      </p:sp>
+      <p:sp>
+        <p:nvSpPr>
+          <p:cNvPr id="4" name="Slide Number Placeholder 3">
+            <a:extLst>
+              <a:ext uri="{FF2B5EF4-FFF2-40B4-BE49-F238E27FC236}">
+                <a16:creationId xmlns:a16="http://schemas.microsoft.com/office/drawing/2014/main" id="{8DC54A4F-408F-2AE8-E17D-8D70EF316CD6}"/>
+              </a:ext>
+            </a:extLst>
+          </p:cNvPr>
+          <p:cNvSpPr>
+            <a:spLocks noGrp="1"/>
+          </p:cNvSpPr>
+          <p:nvPr>
+            <p:ph type="sldNum" sz="quarter" idx="11"/>
+          </p:nvPr>
+        </p:nvSpPr>
+        <p:spPr/>
+        <p:txBody>
+          <a:bodyPr/>
+          <a:lstStyle/>
+          <a:p>
+            <a:fld id="{B67B645E-C5E5-4727-B977-D372A0AA71D9}" type="slidenum">
+              <a:rPr lang="en-US" smtClean="0"/>
+              <a:pPr/>
+              <a:t>17</a:t>
+            </a:fld>
+            <a:endParaRPr lang="en-US" dirty="0"/>
+          </a:p>
+        </p:txBody>
+      </p:sp>
+    </p:spTree>
+    <p:extLst>
+      <p:ext uri="{BB962C8B-B14F-4D97-AF65-F5344CB8AC3E}">
+        <p14:creationId xmlns:p14="http://schemas.microsoft.com/office/powerpoint/2010/main" val="1809417748"/>
+      </p:ext>
+    </p:extLst>
+  </p:cSld>
+  <p:clrMapOvr>
+    <a:masterClrMapping/>
+  </p:clrMapOvr>
+</p:sld>
+</file>
+
+<file path=ppt/slides/slide18.xml><?xml version="1.0" encoding="utf-8"?>
+<p:sld xmlns:a="http://schemas.openxmlformats.org/drawingml/2006/main" xmlns:r="http://schemas.openxmlformats.org/officeDocument/2006/relationships" xmlns:p="http://schemas.openxmlformats.org/presentationml/2006/main">
+  <p:cSld>
+    <p:spTree>
+      <p:nvGrpSpPr>
+        <p:cNvPr id="1" name=""/>
+        <p:cNvGrpSpPr/>
+        <p:nvPr/>
+      </p:nvGrpSpPr>
+      <p:grpSpPr>
+        <a:xfrm>
+          <a:off x="0" y="0"/>
+          <a:ext cx="0" cy="0"/>
+          <a:chOff x="0" y="0"/>
+          <a:chExt cx="0" cy="0"/>
+        </a:xfrm>
+      </p:grpSpPr>
+      <p:sp>
+        <p:nvSpPr>
+          <p:cNvPr id="2" name="Title 1">
+            <a:extLst>
+              <a:ext uri="{FF2B5EF4-FFF2-40B4-BE49-F238E27FC236}">
                 <a16:creationId xmlns:a16="http://schemas.microsoft.com/office/drawing/2014/main" id="{E178EF87-E3BB-A226-DCCF-2D45CE9BE47B}"/>
               </a:ext>
             </a:extLst>
@@ -11589,7 +11901,7 @@
             <a:fld id="{B67B645E-C5E5-4727-B977-D372A0AA71D9}" type="slidenum">
               <a:rPr lang="en-US" smtClean="0"/>
               <a:pPr/>
-              <a:t>17</a:t>
+              <a:t>18</a:t>
             </a:fld>
             <a:endParaRPr lang="en-US" dirty="0"/>
           </a:p>
@@ -11608,7 +11920,7 @@
 </p:sld>
 </file>
 
-<file path=ppt/slides/slide18.xml><?xml version="1.0" encoding="utf-8"?>
+<file path=ppt/slides/slide19.xml><?xml version="1.0" encoding="utf-8"?>
 <p:sld xmlns:a="http://schemas.openxmlformats.org/drawingml/2006/main" xmlns:r="http://schemas.openxmlformats.org/officeDocument/2006/relationships" xmlns:p="http://schemas.openxmlformats.org/presentationml/2006/main">
   <p:cSld>
     <p:spTree>
@@ -12090,8 +12402,8 @@
             <a:chExt cx="3348360" cy="1683360"/>
           </a:xfrm>
         </p:grpSpPr>
-        <mc:AlternateContent xmlns:mc="http://schemas.openxmlformats.org/markup-compatibility/2006">
-          <mc:Choice xmlns:p14="http://schemas.microsoft.com/office/powerpoint/2010/main" Requires="p14">
+        <mc:AlternateContent xmlns:mc="http://schemas.openxmlformats.org/markup-compatibility/2006" xmlns:p14="http://schemas.microsoft.com/office/powerpoint/2010/main">
+          <mc:Choice Requires="p14">
             <p:contentPart p14:bwMode="auto" r:id="rId2">
               <p14:nvContentPartPr>
                 <p14:cNvPr id="18" name="Ink 17">
@@ -12110,7 +12422,7 @@
               </p14:xfrm>
             </p:contentPart>
           </mc:Choice>
-          <mc:Fallback>
+          <mc:Fallback xmlns="">
             <p:pic>
               <p:nvPicPr>
                 <p:cNvPr id="18" name="Ink 17">
@@ -12141,8 +12453,8 @@
             </p:pic>
           </mc:Fallback>
         </mc:AlternateContent>
-        <mc:AlternateContent xmlns:mc="http://schemas.openxmlformats.org/markup-compatibility/2006">
-          <mc:Choice xmlns:p14="http://schemas.microsoft.com/office/powerpoint/2010/main" Requires="p14">
+        <mc:AlternateContent xmlns:mc="http://schemas.openxmlformats.org/markup-compatibility/2006" xmlns:p14="http://schemas.microsoft.com/office/powerpoint/2010/main">
+          <mc:Choice Requires="p14">
             <p:contentPart p14:bwMode="auto" r:id="rId4">
               <p14:nvContentPartPr>
                 <p14:cNvPr id="19" name="Ink 18">
@@ -12161,7 +12473,7 @@
               </p14:xfrm>
             </p:contentPart>
           </mc:Choice>
-          <mc:Fallback>
+          <mc:Fallback xmlns="">
             <p:pic>
               <p:nvPicPr>
                 <p:cNvPr id="19" name="Ink 18">
@@ -12192,8 +12504,8 @@
             </p:pic>
           </mc:Fallback>
         </mc:AlternateContent>
-        <mc:AlternateContent xmlns:mc="http://schemas.openxmlformats.org/markup-compatibility/2006">
-          <mc:Choice xmlns:p14="http://schemas.microsoft.com/office/powerpoint/2010/main" Requires="p14">
+        <mc:AlternateContent xmlns:mc="http://schemas.openxmlformats.org/markup-compatibility/2006" xmlns:p14="http://schemas.microsoft.com/office/powerpoint/2010/main">
+          <mc:Choice Requires="p14">
             <p:contentPart p14:bwMode="auto" r:id="rId6">
               <p14:nvContentPartPr>
                 <p14:cNvPr id="20" name="Ink 19">
@@ -12212,7 +12524,7 @@
               </p14:xfrm>
             </p:contentPart>
           </mc:Choice>
-          <mc:Fallback>
+          <mc:Fallback xmlns="">
             <p:pic>
               <p:nvPicPr>
                 <p:cNvPr id="20" name="Ink 19">
@@ -12243,8 +12555,8 @@
             </p:pic>
           </mc:Fallback>
         </mc:AlternateContent>
-        <mc:AlternateContent xmlns:mc="http://schemas.openxmlformats.org/markup-compatibility/2006">
-          <mc:Choice xmlns:p14="http://schemas.microsoft.com/office/powerpoint/2010/main" Requires="p14">
+        <mc:AlternateContent xmlns:mc="http://schemas.openxmlformats.org/markup-compatibility/2006" xmlns:p14="http://schemas.microsoft.com/office/powerpoint/2010/main">
+          <mc:Choice Requires="p14">
             <p:contentPart p14:bwMode="auto" r:id="rId8">
               <p14:nvContentPartPr>
                 <p14:cNvPr id="21" name="Ink 20">
@@ -12263,7 +12575,7 @@
               </p14:xfrm>
             </p:contentPart>
           </mc:Choice>
-          <mc:Fallback>
+          <mc:Fallback xmlns="">
             <p:pic>
               <p:nvPicPr>
                 <p:cNvPr id="21" name="Ink 20">
@@ -12294,8 +12606,8 @@
             </p:pic>
           </mc:Fallback>
         </mc:AlternateContent>
-        <mc:AlternateContent xmlns:mc="http://schemas.openxmlformats.org/markup-compatibility/2006">
-          <mc:Choice xmlns:p14="http://schemas.microsoft.com/office/powerpoint/2010/main" Requires="p14">
+        <mc:AlternateContent xmlns:mc="http://schemas.openxmlformats.org/markup-compatibility/2006" xmlns:p14="http://schemas.microsoft.com/office/powerpoint/2010/main">
+          <mc:Choice Requires="p14">
             <p:contentPart p14:bwMode="auto" r:id="rId10">
               <p14:nvContentPartPr>
                 <p14:cNvPr id="22" name="Ink 21">
@@ -12314,7 +12626,7 @@
               </p14:xfrm>
             </p:contentPart>
           </mc:Choice>
-          <mc:Fallback>
+          <mc:Fallback xmlns="">
             <p:pic>
               <p:nvPicPr>
                 <p:cNvPr id="22" name="Ink 21">
@@ -12345,8 +12657,8 @@
             </p:pic>
           </mc:Fallback>
         </mc:AlternateContent>
-        <mc:AlternateContent xmlns:mc="http://schemas.openxmlformats.org/markup-compatibility/2006">
-          <mc:Choice xmlns:p14="http://schemas.microsoft.com/office/powerpoint/2010/main" Requires="p14">
+        <mc:AlternateContent xmlns:mc="http://schemas.openxmlformats.org/markup-compatibility/2006" xmlns:p14="http://schemas.microsoft.com/office/powerpoint/2010/main">
+          <mc:Choice Requires="p14">
             <p:contentPart p14:bwMode="auto" r:id="rId12">
               <p14:nvContentPartPr>
                 <p14:cNvPr id="23" name="Ink 22">
@@ -12365,7 +12677,7 @@
               </p14:xfrm>
             </p:contentPart>
           </mc:Choice>
-          <mc:Fallback>
+          <mc:Fallback xmlns="">
             <p:pic>
               <p:nvPicPr>
                 <p:cNvPr id="23" name="Ink 22">
@@ -12396,8 +12708,8 @@
             </p:pic>
           </mc:Fallback>
         </mc:AlternateContent>
-        <mc:AlternateContent xmlns:mc="http://schemas.openxmlformats.org/markup-compatibility/2006">
-          <mc:Choice xmlns:p14="http://schemas.microsoft.com/office/powerpoint/2010/main" Requires="p14">
+        <mc:AlternateContent xmlns:mc="http://schemas.openxmlformats.org/markup-compatibility/2006" xmlns:p14="http://schemas.microsoft.com/office/powerpoint/2010/main">
+          <mc:Choice Requires="p14">
             <p:contentPart p14:bwMode="auto" r:id="rId14">
               <p14:nvContentPartPr>
                 <p14:cNvPr id="24" name="Ink 23">
@@ -12416,7 +12728,7 @@
               </p14:xfrm>
             </p:contentPart>
           </mc:Choice>
-          <mc:Fallback>
+          <mc:Fallback xmlns="">
             <p:pic>
               <p:nvPicPr>
                 <p:cNvPr id="24" name="Ink 23">
@@ -12447,8 +12759,8 @@
             </p:pic>
           </mc:Fallback>
         </mc:AlternateContent>
-        <mc:AlternateContent xmlns:mc="http://schemas.openxmlformats.org/markup-compatibility/2006">
-          <mc:Choice xmlns:p14="http://schemas.microsoft.com/office/powerpoint/2010/main" Requires="p14">
+        <mc:AlternateContent xmlns:mc="http://schemas.openxmlformats.org/markup-compatibility/2006" xmlns:p14="http://schemas.microsoft.com/office/powerpoint/2010/main">
+          <mc:Choice Requires="p14">
             <p:contentPart p14:bwMode="auto" r:id="rId16">
               <p14:nvContentPartPr>
                 <p14:cNvPr id="26" name="Ink 25">
@@ -12467,7 +12779,7 @@
               </p14:xfrm>
             </p:contentPart>
           </mc:Choice>
-          <mc:Fallback>
+          <mc:Fallback xmlns="">
             <p:pic>
               <p:nvPicPr>
                 <p:cNvPr id="26" name="Ink 25">
@@ -12519,8 +12831,8 @@
             <a:chExt cx="33840" cy="444600"/>
           </a:xfrm>
         </p:grpSpPr>
-        <mc:AlternateContent xmlns:mc="http://schemas.openxmlformats.org/markup-compatibility/2006">
-          <mc:Choice xmlns:p14="http://schemas.microsoft.com/office/powerpoint/2010/main" Requires="p14">
+        <mc:AlternateContent xmlns:mc="http://schemas.openxmlformats.org/markup-compatibility/2006" xmlns:p14="http://schemas.microsoft.com/office/powerpoint/2010/main">
+          <mc:Choice Requires="p14">
             <p:contentPart p14:bwMode="auto" r:id="rId18">
               <p14:nvContentPartPr>
                 <p14:cNvPr id="28" name="Ink 27">
@@ -12539,7 +12851,7 @@
               </p14:xfrm>
             </p:contentPart>
           </mc:Choice>
-          <mc:Fallback>
+          <mc:Fallback xmlns="">
             <p:pic>
               <p:nvPicPr>
                 <p:cNvPr id="28" name="Ink 27">
@@ -12570,8 +12882,8 @@
             </p:pic>
           </mc:Fallback>
         </mc:AlternateContent>
-        <mc:AlternateContent xmlns:mc="http://schemas.openxmlformats.org/markup-compatibility/2006">
-          <mc:Choice xmlns:p14="http://schemas.microsoft.com/office/powerpoint/2010/main" Requires="p14">
+        <mc:AlternateContent xmlns:mc="http://schemas.openxmlformats.org/markup-compatibility/2006" xmlns:p14="http://schemas.microsoft.com/office/powerpoint/2010/main">
+          <mc:Choice Requires="p14">
             <p:contentPart p14:bwMode="auto" r:id="rId20">
               <p14:nvContentPartPr>
                 <p14:cNvPr id="29" name="Ink 28">
@@ -12590,7 +12902,7 @@
               </p14:xfrm>
             </p:contentPart>
           </mc:Choice>
-          <mc:Fallback>
+          <mc:Fallback xmlns="">
             <p:pic>
               <p:nvPicPr>
                 <p:cNvPr id="29" name="Ink 28">
@@ -12621,8 +12933,8 @@
             </p:pic>
           </mc:Fallback>
         </mc:AlternateContent>
-        <mc:AlternateContent xmlns:mc="http://schemas.openxmlformats.org/markup-compatibility/2006">
-          <mc:Choice xmlns:p14="http://schemas.microsoft.com/office/powerpoint/2010/main" Requires="p14">
+        <mc:AlternateContent xmlns:mc="http://schemas.openxmlformats.org/markup-compatibility/2006" xmlns:p14="http://schemas.microsoft.com/office/powerpoint/2010/main">
+          <mc:Choice Requires="p14">
             <p:contentPart p14:bwMode="auto" r:id="rId22">
               <p14:nvContentPartPr>
                 <p14:cNvPr id="30" name="Ink 29">
@@ -12641,7 +12953,7 @@
               </p14:xfrm>
             </p:contentPart>
           </mc:Choice>
-          <mc:Fallback>
+          <mc:Fallback xmlns="">
             <p:pic>
               <p:nvPicPr>
                 <p:cNvPr id="30" name="Ink 29">
@@ -12672,8 +12984,8 @@
             </p:pic>
           </mc:Fallback>
         </mc:AlternateContent>
-        <mc:AlternateContent xmlns:mc="http://schemas.openxmlformats.org/markup-compatibility/2006">
-          <mc:Choice xmlns:p14="http://schemas.microsoft.com/office/powerpoint/2010/main" Requires="p14">
+        <mc:AlternateContent xmlns:mc="http://schemas.openxmlformats.org/markup-compatibility/2006" xmlns:p14="http://schemas.microsoft.com/office/powerpoint/2010/main">
+          <mc:Choice Requires="p14">
             <p:contentPart p14:bwMode="auto" r:id="rId24">
               <p14:nvContentPartPr>
                 <p14:cNvPr id="31" name="Ink 30">
@@ -12692,7 +13004,7 @@
               </p14:xfrm>
             </p:contentPart>
           </mc:Choice>
-          <mc:Fallback>
+          <mc:Fallback xmlns="">
             <p:pic>
               <p:nvPicPr>
                 <p:cNvPr id="31" name="Ink 30">
@@ -12744,8 +13056,8 @@
             <a:chExt cx="37080" cy="364680"/>
           </a:xfrm>
         </p:grpSpPr>
-        <mc:AlternateContent xmlns:mc="http://schemas.openxmlformats.org/markup-compatibility/2006">
-          <mc:Choice xmlns:p14="http://schemas.microsoft.com/office/powerpoint/2010/main" Requires="p14">
+        <mc:AlternateContent xmlns:mc="http://schemas.openxmlformats.org/markup-compatibility/2006" xmlns:p14="http://schemas.microsoft.com/office/powerpoint/2010/main">
+          <mc:Choice Requires="p14">
             <p:contentPart p14:bwMode="auto" r:id="rId26">
               <p14:nvContentPartPr>
                 <p14:cNvPr id="32" name="Ink 31">
@@ -12764,7 +13076,7 @@
               </p14:xfrm>
             </p:contentPart>
           </mc:Choice>
-          <mc:Fallback>
+          <mc:Fallback xmlns="">
             <p:pic>
               <p:nvPicPr>
                 <p:cNvPr id="32" name="Ink 31">
@@ -12795,8 +13107,8 @@
             </p:pic>
           </mc:Fallback>
         </mc:AlternateContent>
-        <mc:AlternateContent xmlns:mc="http://schemas.openxmlformats.org/markup-compatibility/2006">
-          <mc:Choice xmlns:p14="http://schemas.microsoft.com/office/powerpoint/2010/main" Requires="p14">
+        <mc:AlternateContent xmlns:mc="http://schemas.openxmlformats.org/markup-compatibility/2006" xmlns:p14="http://schemas.microsoft.com/office/powerpoint/2010/main">
+          <mc:Choice Requires="p14">
             <p:contentPart p14:bwMode="auto" r:id="rId28">
               <p14:nvContentPartPr>
                 <p14:cNvPr id="33" name="Ink 32">
@@ -12815,7 +13127,7 @@
               </p14:xfrm>
             </p:contentPart>
           </mc:Choice>
-          <mc:Fallback>
+          <mc:Fallback xmlns="">
             <p:pic>
               <p:nvPicPr>
                 <p:cNvPr id="33" name="Ink 32">
@@ -12846,8 +13158,8 @@
             </p:pic>
           </mc:Fallback>
         </mc:AlternateContent>
-        <mc:AlternateContent xmlns:mc="http://schemas.openxmlformats.org/markup-compatibility/2006">
-          <mc:Choice xmlns:p14="http://schemas.microsoft.com/office/powerpoint/2010/main" Requires="p14">
+        <mc:AlternateContent xmlns:mc="http://schemas.openxmlformats.org/markup-compatibility/2006" xmlns:p14="http://schemas.microsoft.com/office/powerpoint/2010/main">
+          <mc:Choice Requires="p14">
             <p:contentPart p14:bwMode="auto" r:id="rId30">
               <p14:nvContentPartPr>
                 <p14:cNvPr id="34" name="Ink 33">
@@ -12866,7 +13178,7 @@
               </p14:xfrm>
             </p:contentPart>
           </mc:Choice>
-          <mc:Fallback>
+          <mc:Fallback xmlns="">
             <p:pic>
               <p:nvPicPr>
                 <p:cNvPr id="34" name="Ink 33">
@@ -12918,8 +13230,8 @@
             <a:chExt cx="37800" cy="1077480"/>
           </a:xfrm>
         </p:grpSpPr>
-        <mc:AlternateContent xmlns:mc="http://schemas.openxmlformats.org/markup-compatibility/2006">
-          <mc:Choice xmlns:p14="http://schemas.microsoft.com/office/powerpoint/2010/main" Requires="p14">
+        <mc:AlternateContent xmlns:mc="http://schemas.openxmlformats.org/markup-compatibility/2006" xmlns:p14="http://schemas.microsoft.com/office/powerpoint/2010/main">
+          <mc:Choice Requires="p14">
             <p:contentPart p14:bwMode="auto" r:id="rId32">
               <p14:nvContentPartPr>
                 <p14:cNvPr id="35" name="Ink 34">
@@ -12938,7 +13250,7 @@
               </p14:xfrm>
             </p:contentPart>
           </mc:Choice>
-          <mc:Fallback>
+          <mc:Fallback xmlns="">
             <p:pic>
               <p:nvPicPr>
                 <p:cNvPr id="35" name="Ink 34">
@@ -12969,8 +13281,8 @@
             </p:pic>
           </mc:Fallback>
         </mc:AlternateContent>
-        <mc:AlternateContent xmlns:mc="http://schemas.openxmlformats.org/markup-compatibility/2006">
-          <mc:Choice xmlns:p14="http://schemas.microsoft.com/office/powerpoint/2010/main" Requires="p14">
+        <mc:AlternateContent xmlns:mc="http://schemas.openxmlformats.org/markup-compatibility/2006" xmlns:p14="http://schemas.microsoft.com/office/powerpoint/2010/main">
+          <mc:Choice Requires="p14">
             <p:contentPart p14:bwMode="auto" r:id="rId33">
               <p14:nvContentPartPr>
                 <p14:cNvPr id="36" name="Ink 35">
@@ -12989,7 +13301,7 @@
               </p14:xfrm>
             </p:contentPart>
           </mc:Choice>
-          <mc:Fallback>
+          <mc:Fallback xmlns="">
             <p:pic>
               <p:nvPicPr>
                 <p:cNvPr id="36" name="Ink 35">
@@ -13020,8 +13332,8 @@
             </p:pic>
           </mc:Fallback>
         </mc:AlternateContent>
-        <mc:AlternateContent xmlns:mc="http://schemas.openxmlformats.org/markup-compatibility/2006">
-          <mc:Choice xmlns:p14="http://schemas.microsoft.com/office/powerpoint/2010/main" Requires="p14">
+        <mc:AlternateContent xmlns:mc="http://schemas.openxmlformats.org/markup-compatibility/2006" xmlns:p14="http://schemas.microsoft.com/office/powerpoint/2010/main">
+          <mc:Choice Requires="p14">
             <p:contentPart p14:bwMode="auto" r:id="rId35">
               <p14:nvContentPartPr>
                 <p14:cNvPr id="37" name="Ink 36">
@@ -13040,7 +13352,7 @@
               </p14:xfrm>
             </p:contentPart>
           </mc:Choice>
-          <mc:Fallback>
+          <mc:Fallback xmlns="">
             <p:pic>
               <p:nvPicPr>
                 <p:cNvPr id="37" name="Ink 36">
@@ -13071,8 +13383,8 @@
             </p:pic>
           </mc:Fallback>
         </mc:AlternateContent>
-        <mc:AlternateContent xmlns:mc="http://schemas.openxmlformats.org/markup-compatibility/2006">
-          <mc:Choice xmlns:p14="http://schemas.microsoft.com/office/powerpoint/2010/main" Requires="p14">
+        <mc:AlternateContent xmlns:mc="http://schemas.openxmlformats.org/markup-compatibility/2006" xmlns:p14="http://schemas.microsoft.com/office/powerpoint/2010/main">
+          <mc:Choice Requires="p14">
             <p:contentPart p14:bwMode="auto" r:id="rId36">
               <p14:nvContentPartPr>
                 <p14:cNvPr id="38" name="Ink 37">
@@ -13091,7 +13403,7 @@
               </p14:xfrm>
             </p:contentPart>
           </mc:Choice>
-          <mc:Fallback>
+          <mc:Fallback xmlns="">
             <p:pic>
               <p:nvPicPr>
                 <p:cNvPr id="38" name="Ink 37">
@@ -13122,8 +13434,8 @@
             </p:pic>
           </mc:Fallback>
         </mc:AlternateContent>
-        <mc:AlternateContent xmlns:mc="http://schemas.openxmlformats.org/markup-compatibility/2006">
-          <mc:Choice xmlns:p14="http://schemas.microsoft.com/office/powerpoint/2010/main" Requires="p14">
+        <mc:AlternateContent xmlns:mc="http://schemas.openxmlformats.org/markup-compatibility/2006" xmlns:p14="http://schemas.microsoft.com/office/powerpoint/2010/main">
+          <mc:Choice Requires="p14">
             <p:contentPart p14:bwMode="auto" r:id="rId38">
               <p14:nvContentPartPr>
                 <p14:cNvPr id="39" name="Ink 38">
@@ -13142,7 +13454,7 @@
               </p14:xfrm>
             </p:contentPart>
           </mc:Choice>
-          <mc:Fallback>
+          <mc:Fallback xmlns="">
             <p:pic>
               <p:nvPicPr>
                 <p:cNvPr id="39" name="Ink 38">
@@ -13173,8 +13485,8 @@
             </p:pic>
           </mc:Fallback>
         </mc:AlternateContent>
-        <mc:AlternateContent xmlns:mc="http://schemas.openxmlformats.org/markup-compatibility/2006">
-          <mc:Choice xmlns:p14="http://schemas.microsoft.com/office/powerpoint/2010/main" Requires="p14">
+        <mc:AlternateContent xmlns:mc="http://schemas.openxmlformats.org/markup-compatibility/2006" xmlns:p14="http://schemas.microsoft.com/office/powerpoint/2010/main">
+          <mc:Choice Requires="p14">
             <p:contentPart p14:bwMode="auto" r:id="rId40">
               <p14:nvContentPartPr>
                 <p14:cNvPr id="40" name="Ink 39">
@@ -13193,7 +13505,7 @@
               </p14:xfrm>
             </p:contentPart>
           </mc:Choice>
-          <mc:Fallback>
+          <mc:Fallback xmlns="">
             <p:pic>
               <p:nvPicPr>
                 <p:cNvPr id="40" name="Ink 39">
@@ -13224,8 +13536,8 @@
             </p:pic>
           </mc:Fallback>
         </mc:AlternateContent>
-        <mc:AlternateContent xmlns:mc="http://schemas.openxmlformats.org/markup-compatibility/2006">
-          <mc:Choice xmlns:p14="http://schemas.microsoft.com/office/powerpoint/2010/main" Requires="p14">
+        <mc:AlternateContent xmlns:mc="http://schemas.openxmlformats.org/markup-compatibility/2006" xmlns:p14="http://schemas.microsoft.com/office/powerpoint/2010/main">
+          <mc:Choice Requires="p14">
             <p:contentPart p14:bwMode="auto" r:id="rId41">
               <p14:nvContentPartPr>
                 <p14:cNvPr id="41" name="Ink 40">
@@ -13244,7 +13556,7 @@
               </p14:xfrm>
             </p:contentPart>
           </mc:Choice>
-          <mc:Fallback>
+          <mc:Fallback xmlns="">
             <p:pic>
               <p:nvPicPr>
                 <p:cNvPr id="41" name="Ink 40">
@@ -13275,8 +13587,8 @@
             </p:pic>
           </mc:Fallback>
         </mc:AlternateContent>
-        <mc:AlternateContent xmlns:mc="http://schemas.openxmlformats.org/markup-compatibility/2006">
-          <mc:Choice xmlns:p14="http://schemas.microsoft.com/office/powerpoint/2010/main" Requires="p14">
+        <mc:AlternateContent xmlns:mc="http://schemas.openxmlformats.org/markup-compatibility/2006" xmlns:p14="http://schemas.microsoft.com/office/powerpoint/2010/main">
+          <mc:Choice Requires="p14">
             <p:contentPart p14:bwMode="auto" r:id="rId42">
               <p14:nvContentPartPr>
                 <p14:cNvPr id="42" name="Ink 41">
@@ -13295,7 +13607,7 @@
               </p14:xfrm>
             </p:contentPart>
           </mc:Choice>
-          <mc:Fallback>
+          <mc:Fallback xmlns="">
             <p:pic>
               <p:nvPicPr>
                 <p:cNvPr id="42" name="Ink 41">
@@ -13327,8 +13639,8 @@
           </mc:Fallback>
         </mc:AlternateContent>
       </p:grpSp>
-      <mc:AlternateContent xmlns:mc="http://schemas.openxmlformats.org/markup-compatibility/2006">
-        <mc:Choice xmlns:p14="http://schemas.microsoft.com/office/powerpoint/2010/main" Requires="p14">
+      <mc:AlternateContent xmlns:mc="http://schemas.openxmlformats.org/markup-compatibility/2006" xmlns:p14="http://schemas.microsoft.com/office/powerpoint/2010/main">
+        <mc:Choice Requires="p14">
           <p:contentPart p14:bwMode="auto" r:id="rId43">
             <p14:nvContentPartPr>
               <p14:cNvPr id="46" name="Ink 45">
@@ -13347,7 +13659,7 @@
             </p14:xfrm>
           </p:contentPart>
         </mc:Choice>
-        <mc:Fallback>
+        <mc:Fallback xmlns="">
           <p:pic>
             <p:nvPicPr>
               <p:cNvPr id="46" name="Ink 45">
@@ -13398,8 +13710,8 @@
             <a:chExt cx="900000" cy="46440"/>
           </a:xfrm>
         </p:grpSpPr>
-        <mc:AlternateContent xmlns:mc="http://schemas.openxmlformats.org/markup-compatibility/2006">
-          <mc:Choice xmlns:p14="http://schemas.microsoft.com/office/powerpoint/2010/main" Requires="p14">
+        <mc:AlternateContent xmlns:mc="http://schemas.openxmlformats.org/markup-compatibility/2006" xmlns:p14="http://schemas.microsoft.com/office/powerpoint/2010/main">
+          <mc:Choice Requires="p14">
             <p:contentPart p14:bwMode="auto" r:id="rId44">
               <p14:nvContentPartPr>
                 <p14:cNvPr id="47" name="Ink 46">
@@ -13418,7 +13730,7 @@
               </p14:xfrm>
             </p:contentPart>
           </mc:Choice>
-          <mc:Fallback>
+          <mc:Fallback xmlns="">
             <p:pic>
               <p:nvPicPr>
                 <p:cNvPr id="47" name="Ink 46">
@@ -13449,8 +13761,8 @@
             </p:pic>
           </mc:Fallback>
         </mc:AlternateContent>
-        <mc:AlternateContent xmlns:mc="http://schemas.openxmlformats.org/markup-compatibility/2006">
-          <mc:Choice xmlns:p14="http://schemas.microsoft.com/office/powerpoint/2010/main" Requires="p14">
+        <mc:AlternateContent xmlns:mc="http://schemas.openxmlformats.org/markup-compatibility/2006" xmlns:p14="http://schemas.microsoft.com/office/powerpoint/2010/main">
+          <mc:Choice Requires="p14">
             <p:contentPart p14:bwMode="auto" r:id="rId46">
               <p14:nvContentPartPr>
                 <p14:cNvPr id="48" name="Ink 47">
@@ -13469,7 +13781,7 @@
               </p14:xfrm>
             </p:contentPart>
           </mc:Choice>
-          <mc:Fallback>
+          <mc:Fallback xmlns="">
             <p:pic>
               <p:nvPicPr>
                 <p:cNvPr id="48" name="Ink 47">
@@ -13500,8 +13812,8 @@
             </p:pic>
           </mc:Fallback>
         </mc:AlternateContent>
-        <mc:AlternateContent xmlns:mc="http://schemas.openxmlformats.org/markup-compatibility/2006">
-          <mc:Choice xmlns:p14="http://schemas.microsoft.com/office/powerpoint/2010/main" Requires="p14">
+        <mc:AlternateContent xmlns:mc="http://schemas.openxmlformats.org/markup-compatibility/2006" xmlns:p14="http://schemas.microsoft.com/office/powerpoint/2010/main">
+          <mc:Choice Requires="p14">
             <p:contentPart p14:bwMode="auto" r:id="rId48">
               <p14:nvContentPartPr>
                 <p14:cNvPr id="49" name="Ink 48">
@@ -13520,7 +13832,7 @@
               </p14:xfrm>
             </p:contentPart>
           </mc:Choice>
-          <mc:Fallback>
+          <mc:Fallback xmlns="">
             <p:pic>
               <p:nvPicPr>
                 <p:cNvPr id="49" name="Ink 48">
@@ -13551,8 +13863,8 @@
             </p:pic>
           </mc:Fallback>
         </mc:AlternateContent>
-        <mc:AlternateContent xmlns:mc="http://schemas.openxmlformats.org/markup-compatibility/2006">
-          <mc:Choice xmlns:p14="http://schemas.microsoft.com/office/powerpoint/2010/main" Requires="p14">
+        <mc:AlternateContent xmlns:mc="http://schemas.openxmlformats.org/markup-compatibility/2006" xmlns:p14="http://schemas.microsoft.com/office/powerpoint/2010/main">
+          <mc:Choice Requires="p14">
             <p:contentPart p14:bwMode="auto" r:id="rId50">
               <p14:nvContentPartPr>
                 <p14:cNvPr id="50" name="Ink 49">
@@ -13571,7 +13883,7 @@
               </p14:xfrm>
             </p:contentPart>
           </mc:Choice>
-          <mc:Fallback>
+          <mc:Fallback xmlns="">
             <p:pic>
               <p:nvPicPr>
                 <p:cNvPr id="50" name="Ink 49">
@@ -13603,8 +13915,8 @@
           </mc:Fallback>
         </mc:AlternateContent>
       </p:grpSp>
-      <mc:AlternateContent xmlns:mc="http://schemas.openxmlformats.org/markup-compatibility/2006">
-        <mc:Choice xmlns:p14="http://schemas.microsoft.com/office/powerpoint/2010/main" Requires="p14">
+      <mc:AlternateContent xmlns:mc="http://schemas.openxmlformats.org/markup-compatibility/2006" xmlns:p14="http://schemas.microsoft.com/office/powerpoint/2010/main">
+        <mc:Choice Requires="p14">
           <p:contentPart p14:bwMode="auto" r:id="rId52">
             <p14:nvContentPartPr>
               <p14:cNvPr id="51" name="Ink 50">
@@ -13623,7 +13935,7 @@
             </p14:xfrm>
           </p:contentPart>
         </mc:Choice>
-        <mc:Fallback>
+        <mc:Fallback xmlns="">
           <p:pic>
             <p:nvPicPr>
               <p:cNvPr id="51" name="Ink 50">
@@ -13654,8 +13966,8 @@
           </p:pic>
         </mc:Fallback>
       </mc:AlternateContent>
-      <mc:AlternateContent xmlns:mc="http://schemas.openxmlformats.org/markup-compatibility/2006">
-        <mc:Choice xmlns:p14="http://schemas.microsoft.com/office/powerpoint/2010/main" Requires="p14">
+      <mc:AlternateContent xmlns:mc="http://schemas.openxmlformats.org/markup-compatibility/2006" xmlns:p14="http://schemas.microsoft.com/office/powerpoint/2010/main">
+        <mc:Choice Requires="p14">
           <p:contentPart p14:bwMode="auto" r:id="rId54">
             <p14:nvContentPartPr>
               <p14:cNvPr id="52" name="Ink 51">
@@ -13674,7 +13986,7 @@
             </p14:xfrm>
           </p:contentPart>
         </mc:Choice>
-        <mc:Fallback>
+        <mc:Fallback xmlns="">
           <p:pic>
             <p:nvPicPr>
               <p:cNvPr id="52" name="Ink 51">
@@ -13705,8 +14017,8 @@
           </p:pic>
         </mc:Fallback>
       </mc:AlternateContent>
-      <mc:AlternateContent xmlns:mc="http://schemas.openxmlformats.org/markup-compatibility/2006">
-        <mc:Choice xmlns:p14="http://schemas.microsoft.com/office/powerpoint/2010/main" Requires="p14">
+      <mc:AlternateContent xmlns:mc="http://schemas.openxmlformats.org/markup-compatibility/2006" xmlns:p14="http://schemas.microsoft.com/office/powerpoint/2010/main">
+        <mc:Choice Requires="p14">
           <p:contentPart p14:bwMode="auto" r:id="rId56">
             <p14:nvContentPartPr>
               <p14:cNvPr id="53" name="Ink 52">
@@ -13725,7 +14037,7 @@
             </p14:xfrm>
           </p:contentPart>
         </mc:Choice>
-        <mc:Fallback>
+        <mc:Fallback xmlns="">
           <p:pic>
             <p:nvPicPr>
               <p:cNvPr id="53" name="Ink 52">
@@ -13756,8 +14068,8 @@
           </p:pic>
         </mc:Fallback>
       </mc:AlternateContent>
-      <mc:AlternateContent xmlns:mc="http://schemas.openxmlformats.org/markup-compatibility/2006">
-        <mc:Choice xmlns:p14="http://schemas.microsoft.com/office/powerpoint/2010/main" Requires="p14">
+      <mc:AlternateContent xmlns:mc="http://schemas.openxmlformats.org/markup-compatibility/2006" xmlns:p14="http://schemas.microsoft.com/office/powerpoint/2010/main">
+        <mc:Choice Requires="p14">
           <p:contentPart p14:bwMode="auto" r:id="rId58">
             <p14:nvContentPartPr>
               <p14:cNvPr id="54" name="Ink 53">
@@ -13776,7 +14088,7 @@
             </p14:xfrm>
           </p:contentPart>
         </mc:Choice>
-        <mc:Fallback>
+        <mc:Fallback xmlns="">
           <p:pic>
             <p:nvPicPr>
               <p:cNvPr id="54" name="Ink 53">
@@ -13807,8 +14119,8 @@
           </p:pic>
         </mc:Fallback>
       </mc:AlternateContent>
-      <mc:AlternateContent xmlns:mc="http://schemas.openxmlformats.org/markup-compatibility/2006">
-        <mc:Choice xmlns:p14="http://schemas.microsoft.com/office/powerpoint/2010/main" Requires="p14">
+      <mc:AlternateContent xmlns:mc="http://schemas.openxmlformats.org/markup-compatibility/2006" xmlns:p14="http://schemas.microsoft.com/office/powerpoint/2010/main">
+        <mc:Choice Requires="p14">
           <p:contentPart p14:bwMode="auto" r:id="rId59">
             <p14:nvContentPartPr>
               <p14:cNvPr id="63" name="Ink 62">
@@ -13827,7 +14139,7 @@
             </p14:xfrm>
           </p:contentPart>
         </mc:Choice>
-        <mc:Fallback>
+        <mc:Fallback xmlns="">
           <p:pic>
             <p:nvPicPr>
               <p:cNvPr id="63" name="Ink 62">
@@ -13858,8 +14170,8 @@
           </p:pic>
         </mc:Fallback>
       </mc:AlternateContent>
-      <mc:AlternateContent xmlns:mc="http://schemas.openxmlformats.org/markup-compatibility/2006">
-        <mc:Choice xmlns:p14="http://schemas.microsoft.com/office/powerpoint/2010/main" Requires="p14">
+      <mc:AlternateContent xmlns:mc="http://schemas.openxmlformats.org/markup-compatibility/2006" xmlns:p14="http://schemas.microsoft.com/office/powerpoint/2010/main">
+        <mc:Choice Requires="p14">
           <p:contentPart p14:bwMode="auto" r:id="rId61">
             <p14:nvContentPartPr>
               <p14:cNvPr id="64" name="Ink 63">
@@ -13878,7 +14190,7 @@
             </p14:xfrm>
           </p:contentPart>
         </mc:Choice>
-        <mc:Fallback>
+        <mc:Fallback xmlns="">
           <p:pic>
             <p:nvPicPr>
               <p:cNvPr id="64" name="Ink 63">
@@ -13909,8 +14221,8 @@
           </p:pic>
         </mc:Fallback>
       </mc:AlternateContent>
-      <mc:AlternateContent xmlns:mc="http://schemas.openxmlformats.org/markup-compatibility/2006">
-        <mc:Choice xmlns:p14="http://schemas.microsoft.com/office/powerpoint/2010/main" Requires="p14">
+      <mc:AlternateContent xmlns:mc="http://schemas.openxmlformats.org/markup-compatibility/2006" xmlns:p14="http://schemas.microsoft.com/office/powerpoint/2010/main">
+        <mc:Choice Requires="p14">
           <p:contentPart p14:bwMode="auto" r:id="rId63">
             <p14:nvContentPartPr>
               <p14:cNvPr id="65" name="Ink 64">
@@ -13929,7 +14241,7 @@
             </p14:xfrm>
           </p:contentPart>
         </mc:Choice>
-        <mc:Fallback>
+        <mc:Fallback xmlns="">
           <p:pic>
             <p:nvPicPr>
               <p:cNvPr id="65" name="Ink 64">
@@ -13960,8 +14272,8 @@
           </p:pic>
         </mc:Fallback>
       </mc:AlternateContent>
-      <mc:AlternateContent xmlns:mc="http://schemas.openxmlformats.org/markup-compatibility/2006">
-        <mc:Choice xmlns:p14="http://schemas.microsoft.com/office/powerpoint/2010/main" Requires="p14">
+      <mc:AlternateContent xmlns:mc="http://schemas.openxmlformats.org/markup-compatibility/2006" xmlns:p14="http://schemas.microsoft.com/office/powerpoint/2010/main">
+        <mc:Choice Requires="p14">
           <p:contentPart p14:bwMode="auto" r:id="rId65">
             <p14:nvContentPartPr>
               <p14:cNvPr id="66" name="Ink 65">
@@ -13980,7 +14292,7 @@
             </p14:xfrm>
           </p:contentPart>
         </mc:Choice>
-        <mc:Fallback>
+        <mc:Fallback xmlns="">
           <p:pic>
             <p:nvPicPr>
               <p:cNvPr id="66" name="Ink 65">
@@ -14011,8 +14323,8 @@
           </p:pic>
         </mc:Fallback>
       </mc:AlternateContent>
-      <mc:AlternateContent xmlns:mc="http://schemas.openxmlformats.org/markup-compatibility/2006">
-        <mc:Choice xmlns:p14="http://schemas.microsoft.com/office/powerpoint/2010/main" Requires="p14">
+      <mc:AlternateContent xmlns:mc="http://schemas.openxmlformats.org/markup-compatibility/2006" xmlns:p14="http://schemas.microsoft.com/office/powerpoint/2010/main">
+        <mc:Choice Requires="p14">
           <p:contentPart p14:bwMode="auto" r:id="rId67">
             <p14:nvContentPartPr>
               <p14:cNvPr id="67" name="Ink 66">
@@ -14031,7 +14343,7 @@
             </p14:xfrm>
           </p:contentPart>
         </mc:Choice>
-        <mc:Fallback>
+        <mc:Fallback xmlns="">
           <p:pic>
             <p:nvPicPr>
               <p:cNvPr id="67" name="Ink 66">
@@ -14062,8 +14374,8 @@
           </p:pic>
         </mc:Fallback>
       </mc:AlternateContent>
-      <mc:AlternateContent xmlns:mc="http://schemas.openxmlformats.org/markup-compatibility/2006">
-        <mc:Choice xmlns:p14="http://schemas.microsoft.com/office/powerpoint/2010/main" Requires="p14">
+      <mc:AlternateContent xmlns:mc="http://schemas.openxmlformats.org/markup-compatibility/2006" xmlns:p14="http://schemas.microsoft.com/office/powerpoint/2010/main">
+        <mc:Choice Requires="p14">
           <p:contentPart p14:bwMode="auto" r:id="rId69">
             <p14:nvContentPartPr>
               <p14:cNvPr id="68" name="Ink 67">
@@ -14082,7 +14394,7 @@
             </p14:xfrm>
           </p:contentPart>
         </mc:Choice>
-        <mc:Fallback>
+        <mc:Fallback xmlns="">
           <p:pic>
             <p:nvPicPr>
               <p:cNvPr id="68" name="Ink 67">
@@ -14113,8 +14425,8 @@
           </p:pic>
         </mc:Fallback>
       </mc:AlternateContent>
-      <mc:AlternateContent xmlns:mc="http://schemas.openxmlformats.org/markup-compatibility/2006">
-        <mc:Choice xmlns:p14="http://schemas.microsoft.com/office/powerpoint/2010/main" Requires="p14">
+      <mc:AlternateContent xmlns:mc="http://schemas.openxmlformats.org/markup-compatibility/2006" xmlns:p14="http://schemas.microsoft.com/office/powerpoint/2010/main">
+        <mc:Choice Requires="p14">
           <p:contentPart p14:bwMode="auto" r:id="rId71">
             <p14:nvContentPartPr>
               <p14:cNvPr id="69" name="Ink 68">
@@ -14133,7 +14445,7 @@
             </p14:xfrm>
           </p:contentPart>
         </mc:Choice>
-        <mc:Fallback>
+        <mc:Fallback xmlns="">
           <p:pic>
             <p:nvPicPr>
               <p:cNvPr id="69" name="Ink 68">
@@ -14184,8 +14496,8 @@
             <a:chExt cx="250200" cy="16920"/>
           </a:xfrm>
         </p:grpSpPr>
-        <mc:AlternateContent xmlns:mc="http://schemas.openxmlformats.org/markup-compatibility/2006">
-          <mc:Choice xmlns:p14="http://schemas.microsoft.com/office/powerpoint/2010/main" Requires="p14">
+        <mc:AlternateContent xmlns:mc="http://schemas.openxmlformats.org/markup-compatibility/2006" xmlns:p14="http://schemas.microsoft.com/office/powerpoint/2010/main">
+          <mc:Choice Requires="p14">
             <p:contentPart p14:bwMode="auto" r:id="rId72">
               <p14:nvContentPartPr>
                 <p14:cNvPr id="70" name="Ink 69">
@@ -14204,7 +14516,7 @@
               </p14:xfrm>
             </p:contentPart>
           </mc:Choice>
-          <mc:Fallback>
+          <mc:Fallback xmlns="">
             <p:pic>
               <p:nvPicPr>
                 <p:cNvPr id="70" name="Ink 69">
@@ -14235,8 +14547,8 @@
             </p:pic>
           </mc:Fallback>
         </mc:AlternateContent>
-        <mc:AlternateContent xmlns:mc="http://schemas.openxmlformats.org/markup-compatibility/2006">
-          <mc:Choice xmlns:p14="http://schemas.microsoft.com/office/powerpoint/2010/main" Requires="p14">
+        <mc:AlternateContent xmlns:mc="http://schemas.openxmlformats.org/markup-compatibility/2006" xmlns:p14="http://schemas.microsoft.com/office/powerpoint/2010/main">
+          <mc:Choice Requires="p14">
             <p:contentPart p14:bwMode="auto" r:id="rId74">
               <p14:nvContentPartPr>
                 <p14:cNvPr id="71" name="Ink 70">
@@ -14255,7 +14567,7 @@
               </p14:xfrm>
             </p:contentPart>
           </mc:Choice>
-          <mc:Fallback>
+          <mc:Fallback xmlns="">
             <p:pic>
               <p:nvPicPr>
                 <p:cNvPr id="71" name="Ink 70">
@@ -14287,8 +14599,8 @@
           </mc:Fallback>
         </mc:AlternateContent>
       </p:grpSp>
-      <mc:AlternateContent xmlns:mc="http://schemas.openxmlformats.org/markup-compatibility/2006">
-        <mc:Choice xmlns:p14="http://schemas.microsoft.com/office/powerpoint/2010/main" Requires="p14">
+      <mc:AlternateContent xmlns:mc="http://schemas.openxmlformats.org/markup-compatibility/2006" xmlns:p14="http://schemas.microsoft.com/office/powerpoint/2010/main">
+        <mc:Choice Requires="p14">
           <p:contentPart p14:bwMode="auto" r:id="rId76">
             <p14:nvContentPartPr>
               <p14:cNvPr id="72" name="Ink 71">
@@ -14307,7 +14619,7 @@
             </p14:xfrm>
           </p:contentPart>
         </mc:Choice>
-        <mc:Fallback>
+        <mc:Fallback xmlns="">
           <p:pic>
             <p:nvPicPr>
               <p:cNvPr id="72" name="Ink 71">
@@ -14338,8 +14650,8 @@
           </p:pic>
         </mc:Fallback>
       </mc:AlternateContent>
-      <mc:AlternateContent xmlns:mc="http://schemas.openxmlformats.org/markup-compatibility/2006">
-        <mc:Choice xmlns:p14="http://schemas.microsoft.com/office/powerpoint/2010/main" Requires="p14">
+      <mc:AlternateContent xmlns:mc="http://schemas.openxmlformats.org/markup-compatibility/2006" xmlns:p14="http://schemas.microsoft.com/office/powerpoint/2010/main">
+        <mc:Choice Requires="p14">
           <p:contentPart p14:bwMode="auto" r:id="rId78">
             <p14:nvContentPartPr>
               <p14:cNvPr id="73" name="Ink 72">
@@ -14358,7 +14670,7 @@
             </p14:xfrm>
           </p:contentPart>
         </mc:Choice>
-        <mc:Fallback>
+        <mc:Fallback xmlns="">
           <p:pic>
             <p:nvPicPr>
               <p:cNvPr id="73" name="Ink 72">
@@ -14389,8 +14701,8 @@
           </p:pic>
         </mc:Fallback>
       </mc:AlternateContent>
-      <mc:AlternateContent xmlns:mc="http://schemas.openxmlformats.org/markup-compatibility/2006">
-        <mc:Choice xmlns:p14="http://schemas.microsoft.com/office/powerpoint/2010/main" Requires="p14">
+      <mc:AlternateContent xmlns:mc="http://schemas.openxmlformats.org/markup-compatibility/2006" xmlns:p14="http://schemas.microsoft.com/office/powerpoint/2010/main">
+        <mc:Choice Requires="p14">
           <p:contentPart p14:bwMode="auto" r:id="rId80">
             <p14:nvContentPartPr>
               <p14:cNvPr id="74" name="Ink 73">
@@ -14409,7 +14721,7 @@
             </p14:xfrm>
           </p:contentPart>
         </mc:Choice>
-        <mc:Fallback>
+        <mc:Fallback xmlns="">
           <p:pic>
             <p:nvPicPr>
               <p:cNvPr id="74" name="Ink 73">
@@ -14440,8 +14752,8 @@
           </p:pic>
         </mc:Fallback>
       </mc:AlternateContent>
-      <mc:AlternateContent xmlns:mc="http://schemas.openxmlformats.org/markup-compatibility/2006">
-        <mc:Choice xmlns:p14="http://schemas.microsoft.com/office/powerpoint/2010/main" Requires="p14">
+      <mc:AlternateContent xmlns:mc="http://schemas.openxmlformats.org/markup-compatibility/2006" xmlns:p14="http://schemas.microsoft.com/office/powerpoint/2010/main">
+        <mc:Choice Requires="p14">
           <p:contentPart p14:bwMode="auto" r:id="rId82">
             <p14:nvContentPartPr>
               <p14:cNvPr id="75" name="Ink 74">
@@ -14460,7 +14772,7 @@
             </p14:xfrm>
           </p:contentPart>
         </mc:Choice>
-        <mc:Fallback>
+        <mc:Fallback xmlns="">
           <p:pic>
             <p:nvPicPr>
               <p:cNvPr id="75" name="Ink 74">
@@ -14491,8 +14803,8 @@
           </p:pic>
         </mc:Fallback>
       </mc:AlternateContent>
-      <mc:AlternateContent xmlns:mc="http://schemas.openxmlformats.org/markup-compatibility/2006">
-        <mc:Choice xmlns:p14="http://schemas.microsoft.com/office/powerpoint/2010/main" Requires="p14">
+      <mc:AlternateContent xmlns:mc="http://schemas.openxmlformats.org/markup-compatibility/2006" xmlns:p14="http://schemas.microsoft.com/office/powerpoint/2010/main">
+        <mc:Choice Requires="p14">
           <p:contentPart p14:bwMode="auto" r:id="rId84">
             <p14:nvContentPartPr>
               <p14:cNvPr id="76" name="Ink 75">
@@ -14511,7 +14823,7 @@
             </p14:xfrm>
           </p:contentPart>
         </mc:Choice>
-        <mc:Fallback>
+        <mc:Fallback xmlns="">
           <p:pic>
             <p:nvPicPr>
               <p:cNvPr id="76" name="Ink 75">
@@ -14542,8 +14854,8 @@
           </p:pic>
         </mc:Fallback>
       </mc:AlternateContent>
-      <mc:AlternateContent xmlns:mc="http://schemas.openxmlformats.org/markup-compatibility/2006">
-        <mc:Choice xmlns:p14="http://schemas.microsoft.com/office/powerpoint/2010/main" Requires="p14">
+      <mc:AlternateContent xmlns:mc="http://schemas.openxmlformats.org/markup-compatibility/2006" xmlns:p14="http://schemas.microsoft.com/office/powerpoint/2010/main">
+        <mc:Choice Requires="p14">
           <p:contentPart p14:bwMode="auto" r:id="rId86">
             <p14:nvContentPartPr>
               <p14:cNvPr id="77" name="Ink 76">
@@ -14562,7 +14874,7 @@
             </p14:xfrm>
           </p:contentPart>
         </mc:Choice>
-        <mc:Fallback>
+        <mc:Fallback xmlns="">
           <p:pic>
             <p:nvPicPr>
               <p:cNvPr id="77" name="Ink 76">
@@ -14613,8 +14925,8 @@
             <a:chExt cx="195840" cy="22680"/>
           </a:xfrm>
         </p:grpSpPr>
-        <mc:AlternateContent xmlns:mc="http://schemas.openxmlformats.org/markup-compatibility/2006">
-          <mc:Choice xmlns:p14="http://schemas.microsoft.com/office/powerpoint/2010/main" Requires="p14">
+        <mc:AlternateContent xmlns:mc="http://schemas.openxmlformats.org/markup-compatibility/2006" xmlns:p14="http://schemas.microsoft.com/office/powerpoint/2010/main">
+          <mc:Choice Requires="p14">
             <p:contentPart p14:bwMode="auto" r:id="rId88">
               <p14:nvContentPartPr>
                 <p14:cNvPr id="78" name="Ink 77">
@@ -14633,7 +14945,7 @@
               </p14:xfrm>
             </p:contentPart>
           </mc:Choice>
-          <mc:Fallback>
+          <mc:Fallback xmlns="">
             <p:pic>
               <p:nvPicPr>
                 <p:cNvPr id="78" name="Ink 77">
@@ -14664,8 +14976,8 @@
             </p:pic>
           </mc:Fallback>
         </mc:AlternateContent>
-        <mc:AlternateContent xmlns:mc="http://schemas.openxmlformats.org/markup-compatibility/2006">
-          <mc:Choice xmlns:p14="http://schemas.microsoft.com/office/powerpoint/2010/main" Requires="p14">
+        <mc:AlternateContent xmlns:mc="http://schemas.openxmlformats.org/markup-compatibility/2006" xmlns:p14="http://schemas.microsoft.com/office/powerpoint/2010/main">
+          <mc:Choice Requires="p14">
             <p:contentPart p14:bwMode="auto" r:id="rId90">
               <p14:nvContentPartPr>
                 <p14:cNvPr id="79" name="Ink 78">
@@ -14684,7 +14996,7 @@
               </p14:xfrm>
             </p:contentPart>
           </mc:Choice>
-          <mc:Fallback>
+          <mc:Fallback xmlns="">
             <p:pic>
               <p:nvPicPr>
                 <p:cNvPr id="79" name="Ink 78">
@@ -14716,8 +15028,8 @@
           </mc:Fallback>
         </mc:AlternateContent>
       </p:grpSp>
-      <mc:AlternateContent xmlns:mc="http://schemas.openxmlformats.org/markup-compatibility/2006">
-        <mc:Choice xmlns:p14="http://schemas.microsoft.com/office/powerpoint/2010/main" Requires="p14">
+      <mc:AlternateContent xmlns:mc="http://schemas.openxmlformats.org/markup-compatibility/2006" xmlns:p14="http://schemas.microsoft.com/office/powerpoint/2010/main">
+        <mc:Choice Requires="p14">
           <p:contentPart p14:bwMode="auto" r:id="rId91">
             <p14:nvContentPartPr>
               <p14:cNvPr id="84" name="Ink 83">
@@ -14736,7 +15048,7 @@
             </p14:xfrm>
           </p:contentPart>
         </mc:Choice>
-        <mc:Fallback>
+        <mc:Fallback xmlns="">
           <p:pic>
             <p:nvPicPr>
               <p:cNvPr id="84" name="Ink 83">
@@ -14787,8 +15099,8 @@
             <a:chExt cx="2538000" cy="1175760"/>
           </a:xfrm>
         </p:grpSpPr>
-        <mc:AlternateContent xmlns:mc="http://schemas.openxmlformats.org/markup-compatibility/2006">
-          <mc:Choice xmlns:p14="http://schemas.microsoft.com/office/powerpoint/2010/main" Requires="p14">
+        <mc:AlternateContent xmlns:mc="http://schemas.openxmlformats.org/markup-compatibility/2006" xmlns:p14="http://schemas.microsoft.com/office/powerpoint/2010/main">
+          <mc:Choice Requires="p14">
             <p:contentPart p14:bwMode="auto" r:id="rId93">
               <p14:nvContentPartPr>
                 <p14:cNvPr id="85" name="Ink 84">
@@ -14807,7 +15119,7 @@
               </p14:xfrm>
             </p:contentPart>
           </mc:Choice>
-          <mc:Fallback>
+          <mc:Fallback xmlns="">
             <p:pic>
               <p:nvPicPr>
                 <p:cNvPr id="85" name="Ink 84">
@@ -14838,8 +15150,8 @@
             </p:pic>
           </mc:Fallback>
         </mc:AlternateContent>
-        <mc:AlternateContent xmlns:mc="http://schemas.openxmlformats.org/markup-compatibility/2006">
-          <mc:Choice xmlns:p14="http://schemas.microsoft.com/office/powerpoint/2010/main" Requires="p14">
+        <mc:AlternateContent xmlns:mc="http://schemas.openxmlformats.org/markup-compatibility/2006" xmlns:p14="http://schemas.microsoft.com/office/powerpoint/2010/main">
+          <mc:Choice Requires="p14">
             <p:contentPart p14:bwMode="auto" r:id="rId95">
               <p14:nvContentPartPr>
                 <p14:cNvPr id="86" name="Ink 85">
@@ -14858,7 +15170,7 @@
               </p14:xfrm>
             </p:contentPart>
           </mc:Choice>
-          <mc:Fallback>
+          <mc:Fallback xmlns="">
             <p:pic>
               <p:nvPicPr>
                 <p:cNvPr id="86" name="Ink 85">
@@ -14889,8 +15201,8 @@
             </p:pic>
           </mc:Fallback>
         </mc:AlternateContent>
-        <mc:AlternateContent xmlns:mc="http://schemas.openxmlformats.org/markup-compatibility/2006">
-          <mc:Choice xmlns:p14="http://schemas.microsoft.com/office/powerpoint/2010/main" Requires="p14">
+        <mc:AlternateContent xmlns:mc="http://schemas.openxmlformats.org/markup-compatibility/2006" xmlns:p14="http://schemas.microsoft.com/office/powerpoint/2010/main">
+          <mc:Choice Requires="p14">
             <p:contentPart p14:bwMode="auto" r:id="rId97">
               <p14:nvContentPartPr>
                 <p14:cNvPr id="87" name="Ink 86">
@@ -14909,7 +15221,7 @@
               </p14:xfrm>
             </p:contentPart>
           </mc:Choice>
-          <mc:Fallback>
+          <mc:Fallback xmlns="">
             <p:pic>
               <p:nvPicPr>
                 <p:cNvPr id="87" name="Ink 86">
@@ -14940,8 +15252,8 @@
             </p:pic>
           </mc:Fallback>
         </mc:AlternateContent>
-        <mc:AlternateContent xmlns:mc="http://schemas.openxmlformats.org/markup-compatibility/2006">
-          <mc:Choice xmlns:p14="http://schemas.microsoft.com/office/powerpoint/2010/main" Requires="p14">
+        <mc:AlternateContent xmlns:mc="http://schemas.openxmlformats.org/markup-compatibility/2006" xmlns:p14="http://schemas.microsoft.com/office/powerpoint/2010/main">
+          <mc:Choice Requires="p14">
             <p:contentPart p14:bwMode="auto" r:id="rId99">
               <p14:nvContentPartPr>
                 <p14:cNvPr id="88" name="Ink 87">
@@ -14960,7 +15272,7 @@
               </p14:xfrm>
             </p:contentPart>
           </mc:Choice>
-          <mc:Fallback>
+          <mc:Fallback xmlns="">
             <p:pic>
               <p:nvPicPr>
                 <p:cNvPr id="88" name="Ink 87">
@@ -14991,8 +15303,8 @@
             </p:pic>
           </mc:Fallback>
         </mc:AlternateContent>
-        <mc:AlternateContent xmlns:mc="http://schemas.openxmlformats.org/markup-compatibility/2006">
-          <mc:Choice xmlns:p14="http://schemas.microsoft.com/office/powerpoint/2010/main" Requires="p14">
+        <mc:AlternateContent xmlns:mc="http://schemas.openxmlformats.org/markup-compatibility/2006" xmlns:p14="http://schemas.microsoft.com/office/powerpoint/2010/main">
+          <mc:Choice Requires="p14">
             <p:contentPart p14:bwMode="auto" r:id="rId101">
               <p14:nvContentPartPr>
                 <p14:cNvPr id="89" name="Ink 88">
@@ -15011,7 +15323,7 @@
               </p14:xfrm>
             </p:contentPart>
           </mc:Choice>
-          <mc:Fallback>
+          <mc:Fallback xmlns="">
             <p:pic>
               <p:nvPicPr>
                 <p:cNvPr id="89" name="Ink 88">
@@ -15042,8 +15354,8 @@
             </p:pic>
           </mc:Fallback>
         </mc:AlternateContent>
-        <mc:AlternateContent xmlns:mc="http://schemas.openxmlformats.org/markup-compatibility/2006">
-          <mc:Choice xmlns:p14="http://schemas.microsoft.com/office/powerpoint/2010/main" Requires="p14">
+        <mc:AlternateContent xmlns:mc="http://schemas.openxmlformats.org/markup-compatibility/2006" xmlns:p14="http://schemas.microsoft.com/office/powerpoint/2010/main">
+          <mc:Choice Requires="p14">
             <p:contentPart p14:bwMode="auto" r:id="rId103">
               <p14:nvContentPartPr>
                 <p14:cNvPr id="90" name="Ink 89">
@@ -15062,7 +15374,7 @@
               </p14:xfrm>
             </p:contentPart>
           </mc:Choice>
-          <mc:Fallback>
+          <mc:Fallback xmlns="">
             <p:pic>
               <p:nvPicPr>
                 <p:cNvPr id="90" name="Ink 89">
@@ -15093,8 +15405,8 @@
             </p:pic>
           </mc:Fallback>
         </mc:AlternateContent>
-        <mc:AlternateContent xmlns:mc="http://schemas.openxmlformats.org/markup-compatibility/2006">
-          <mc:Choice xmlns:p14="http://schemas.microsoft.com/office/powerpoint/2010/main" Requires="p14">
+        <mc:AlternateContent xmlns:mc="http://schemas.openxmlformats.org/markup-compatibility/2006" xmlns:p14="http://schemas.microsoft.com/office/powerpoint/2010/main">
+          <mc:Choice Requires="p14">
             <p:contentPart p14:bwMode="auto" r:id="rId105">
               <p14:nvContentPartPr>
                 <p14:cNvPr id="91" name="Ink 90">
@@ -15113,7 +15425,7 @@
               </p14:xfrm>
             </p:contentPart>
           </mc:Choice>
-          <mc:Fallback>
+          <mc:Fallback xmlns="">
             <p:pic>
               <p:nvPicPr>
                 <p:cNvPr id="91" name="Ink 90">
@@ -15144,8 +15456,8 @@
             </p:pic>
           </mc:Fallback>
         </mc:AlternateContent>
-        <mc:AlternateContent xmlns:mc="http://schemas.openxmlformats.org/markup-compatibility/2006">
-          <mc:Choice xmlns:p14="http://schemas.microsoft.com/office/powerpoint/2010/main" Requires="p14">
+        <mc:AlternateContent xmlns:mc="http://schemas.openxmlformats.org/markup-compatibility/2006" xmlns:p14="http://schemas.microsoft.com/office/powerpoint/2010/main">
+          <mc:Choice Requires="p14">
             <p:contentPart p14:bwMode="auto" r:id="rId107">
               <p14:nvContentPartPr>
                 <p14:cNvPr id="92" name="Ink 91">
@@ -15164,7 +15476,7 @@
               </p14:xfrm>
             </p:contentPart>
           </mc:Choice>
-          <mc:Fallback>
+          <mc:Fallback xmlns="">
             <p:pic>
               <p:nvPicPr>
                 <p:cNvPr id="92" name="Ink 91">
@@ -15195,8 +15507,8 @@
             </p:pic>
           </mc:Fallback>
         </mc:AlternateContent>
-        <mc:AlternateContent xmlns:mc="http://schemas.openxmlformats.org/markup-compatibility/2006">
-          <mc:Choice xmlns:p14="http://schemas.microsoft.com/office/powerpoint/2010/main" Requires="p14">
+        <mc:AlternateContent xmlns:mc="http://schemas.openxmlformats.org/markup-compatibility/2006" xmlns:p14="http://schemas.microsoft.com/office/powerpoint/2010/main">
+          <mc:Choice Requires="p14">
             <p:contentPart p14:bwMode="auto" r:id="rId109">
               <p14:nvContentPartPr>
                 <p14:cNvPr id="93" name="Ink 92">
@@ -15215,7 +15527,7 @@
               </p14:xfrm>
             </p:contentPart>
           </mc:Choice>
-          <mc:Fallback>
+          <mc:Fallback xmlns="">
             <p:pic>
               <p:nvPicPr>
                 <p:cNvPr id="93" name="Ink 92">
@@ -15246,8 +15558,8 @@
             </p:pic>
           </mc:Fallback>
         </mc:AlternateContent>
-        <mc:AlternateContent xmlns:mc="http://schemas.openxmlformats.org/markup-compatibility/2006">
-          <mc:Choice xmlns:p14="http://schemas.microsoft.com/office/powerpoint/2010/main" Requires="p14">
+        <mc:AlternateContent xmlns:mc="http://schemas.openxmlformats.org/markup-compatibility/2006" xmlns:p14="http://schemas.microsoft.com/office/powerpoint/2010/main">
+          <mc:Choice Requires="p14">
             <p:contentPart p14:bwMode="auto" r:id="rId111">
               <p14:nvContentPartPr>
                 <p14:cNvPr id="94" name="Ink 93">
@@ -15266,7 +15578,7 @@
               </p14:xfrm>
             </p:contentPart>
           </mc:Choice>
-          <mc:Fallback>
+          <mc:Fallback xmlns="">
             <p:pic>
               <p:nvPicPr>
                 <p:cNvPr id="94" name="Ink 93">
@@ -15297,8 +15609,8 @@
             </p:pic>
           </mc:Fallback>
         </mc:AlternateContent>
-        <mc:AlternateContent xmlns:mc="http://schemas.openxmlformats.org/markup-compatibility/2006">
-          <mc:Choice xmlns:p14="http://schemas.microsoft.com/office/powerpoint/2010/main" Requires="p14">
+        <mc:AlternateContent xmlns:mc="http://schemas.openxmlformats.org/markup-compatibility/2006" xmlns:p14="http://schemas.microsoft.com/office/powerpoint/2010/main">
+          <mc:Choice Requires="p14">
             <p:contentPart p14:bwMode="auto" r:id="rId113">
               <p14:nvContentPartPr>
                 <p14:cNvPr id="95" name="Ink 94">
@@ -15317,7 +15629,7 @@
               </p14:xfrm>
             </p:contentPart>
           </mc:Choice>
-          <mc:Fallback>
+          <mc:Fallback xmlns="">
             <p:pic>
               <p:nvPicPr>
                 <p:cNvPr id="95" name="Ink 94">
@@ -15348,8 +15660,8 @@
             </p:pic>
           </mc:Fallback>
         </mc:AlternateContent>
-        <mc:AlternateContent xmlns:mc="http://schemas.openxmlformats.org/markup-compatibility/2006">
-          <mc:Choice xmlns:p14="http://schemas.microsoft.com/office/powerpoint/2010/main" Requires="p14">
+        <mc:AlternateContent xmlns:mc="http://schemas.openxmlformats.org/markup-compatibility/2006" xmlns:p14="http://schemas.microsoft.com/office/powerpoint/2010/main">
+          <mc:Choice Requires="p14">
             <p:contentPart p14:bwMode="auto" r:id="rId115">
               <p14:nvContentPartPr>
                 <p14:cNvPr id="96" name="Ink 95">
@@ -15368,7 +15680,7 @@
               </p14:xfrm>
             </p:contentPart>
           </mc:Choice>
-          <mc:Fallback>
+          <mc:Fallback xmlns="">
             <p:pic>
               <p:nvPicPr>
                 <p:cNvPr id="96" name="Ink 95">
@@ -15399,8 +15711,8 @@
             </p:pic>
           </mc:Fallback>
         </mc:AlternateContent>
-        <mc:AlternateContent xmlns:mc="http://schemas.openxmlformats.org/markup-compatibility/2006">
-          <mc:Choice xmlns:p14="http://schemas.microsoft.com/office/powerpoint/2010/main" Requires="p14">
+        <mc:AlternateContent xmlns:mc="http://schemas.openxmlformats.org/markup-compatibility/2006" xmlns:p14="http://schemas.microsoft.com/office/powerpoint/2010/main">
+          <mc:Choice Requires="p14">
             <p:contentPart p14:bwMode="auto" r:id="rId117">
               <p14:nvContentPartPr>
                 <p14:cNvPr id="97" name="Ink 96">
@@ -15419,7 +15731,7 @@
               </p14:xfrm>
             </p:contentPart>
           </mc:Choice>
-          <mc:Fallback>
+          <mc:Fallback xmlns="">
             <p:pic>
               <p:nvPicPr>
                 <p:cNvPr id="97" name="Ink 96">
@@ -15450,8 +15762,8 @@
             </p:pic>
           </mc:Fallback>
         </mc:AlternateContent>
-        <mc:AlternateContent xmlns:mc="http://schemas.openxmlformats.org/markup-compatibility/2006">
-          <mc:Choice xmlns:p14="http://schemas.microsoft.com/office/powerpoint/2010/main" Requires="p14">
+        <mc:AlternateContent xmlns:mc="http://schemas.openxmlformats.org/markup-compatibility/2006" xmlns:p14="http://schemas.microsoft.com/office/powerpoint/2010/main">
+          <mc:Choice Requires="p14">
             <p:contentPart p14:bwMode="auto" r:id="rId119">
               <p14:nvContentPartPr>
                 <p14:cNvPr id="98" name="Ink 97">
@@ -15470,7 +15782,7 @@
               </p14:xfrm>
             </p:contentPart>
           </mc:Choice>
-          <mc:Fallback>
+          <mc:Fallback xmlns="">
             <p:pic>
               <p:nvPicPr>
                 <p:cNvPr id="98" name="Ink 97">
@@ -15501,8 +15813,8 @@
             </p:pic>
           </mc:Fallback>
         </mc:AlternateContent>
-        <mc:AlternateContent xmlns:mc="http://schemas.openxmlformats.org/markup-compatibility/2006">
-          <mc:Choice xmlns:p14="http://schemas.microsoft.com/office/powerpoint/2010/main" Requires="p14">
+        <mc:AlternateContent xmlns:mc="http://schemas.openxmlformats.org/markup-compatibility/2006" xmlns:p14="http://schemas.microsoft.com/office/powerpoint/2010/main">
+          <mc:Choice Requires="p14">
             <p:contentPart p14:bwMode="auto" r:id="rId121">
               <p14:nvContentPartPr>
                 <p14:cNvPr id="99" name="Ink 98">
@@ -15521,7 +15833,7 @@
               </p14:xfrm>
             </p:contentPart>
           </mc:Choice>
-          <mc:Fallback>
+          <mc:Fallback xmlns="">
             <p:pic>
               <p:nvPicPr>
                 <p:cNvPr id="99" name="Ink 98">
@@ -15552,8 +15864,8 @@
             </p:pic>
           </mc:Fallback>
         </mc:AlternateContent>
-        <mc:AlternateContent xmlns:mc="http://schemas.openxmlformats.org/markup-compatibility/2006">
-          <mc:Choice xmlns:p14="http://schemas.microsoft.com/office/powerpoint/2010/main" Requires="p14">
+        <mc:AlternateContent xmlns:mc="http://schemas.openxmlformats.org/markup-compatibility/2006" xmlns:p14="http://schemas.microsoft.com/office/powerpoint/2010/main">
+          <mc:Choice Requires="p14">
             <p:contentPart p14:bwMode="auto" r:id="rId123">
               <p14:nvContentPartPr>
                 <p14:cNvPr id="100" name="Ink 99">
@@ -15572,7 +15884,7 @@
               </p14:xfrm>
             </p:contentPart>
           </mc:Choice>
-          <mc:Fallback>
+          <mc:Fallback xmlns="">
             <p:pic>
               <p:nvPicPr>
                 <p:cNvPr id="100" name="Ink 99">
@@ -15603,8 +15915,8 @@
             </p:pic>
           </mc:Fallback>
         </mc:AlternateContent>
-        <mc:AlternateContent xmlns:mc="http://schemas.openxmlformats.org/markup-compatibility/2006">
-          <mc:Choice xmlns:p14="http://schemas.microsoft.com/office/powerpoint/2010/main" Requires="p14">
+        <mc:AlternateContent xmlns:mc="http://schemas.openxmlformats.org/markup-compatibility/2006" xmlns:p14="http://schemas.microsoft.com/office/powerpoint/2010/main">
+          <mc:Choice Requires="p14">
             <p:contentPart p14:bwMode="auto" r:id="rId125">
               <p14:nvContentPartPr>
                 <p14:cNvPr id="101" name="Ink 100">
@@ -15623,7 +15935,7 @@
               </p14:xfrm>
             </p:contentPart>
           </mc:Choice>
-          <mc:Fallback>
+          <mc:Fallback xmlns="">
             <p:pic>
               <p:nvPicPr>
                 <p:cNvPr id="101" name="Ink 100">
@@ -15654,8 +15966,8 @@
             </p:pic>
           </mc:Fallback>
         </mc:AlternateContent>
-        <mc:AlternateContent xmlns:mc="http://schemas.openxmlformats.org/markup-compatibility/2006">
-          <mc:Choice xmlns:p14="http://schemas.microsoft.com/office/powerpoint/2010/main" Requires="p14">
+        <mc:AlternateContent xmlns:mc="http://schemas.openxmlformats.org/markup-compatibility/2006" xmlns:p14="http://schemas.microsoft.com/office/powerpoint/2010/main">
+          <mc:Choice Requires="p14">
             <p:contentPart p14:bwMode="auto" r:id="rId127">
               <p14:nvContentPartPr>
                 <p14:cNvPr id="102" name="Ink 101">
@@ -15674,7 +15986,7 @@
               </p14:xfrm>
             </p:contentPart>
           </mc:Choice>
-          <mc:Fallback>
+          <mc:Fallback xmlns="">
             <p:pic>
               <p:nvPicPr>
                 <p:cNvPr id="102" name="Ink 101">
@@ -15705,8 +16017,8 @@
             </p:pic>
           </mc:Fallback>
         </mc:AlternateContent>
-        <mc:AlternateContent xmlns:mc="http://schemas.openxmlformats.org/markup-compatibility/2006">
-          <mc:Choice xmlns:p14="http://schemas.microsoft.com/office/powerpoint/2010/main" Requires="p14">
+        <mc:AlternateContent xmlns:mc="http://schemas.openxmlformats.org/markup-compatibility/2006" xmlns:p14="http://schemas.microsoft.com/office/powerpoint/2010/main">
+          <mc:Choice Requires="p14">
             <p:contentPart p14:bwMode="auto" r:id="rId129">
               <p14:nvContentPartPr>
                 <p14:cNvPr id="103" name="Ink 102">
@@ -15725,7 +16037,7 @@
               </p14:xfrm>
             </p:contentPart>
           </mc:Choice>
-          <mc:Fallback>
+          <mc:Fallback xmlns="">
             <p:pic>
               <p:nvPicPr>
                 <p:cNvPr id="103" name="Ink 102">
@@ -15756,8 +16068,8 @@
             </p:pic>
           </mc:Fallback>
         </mc:AlternateContent>
-        <mc:AlternateContent xmlns:mc="http://schemas.openxmlformats.org/markup-compatibility/2006">
-          <mc:Choice xmlns:p14="http://schemas.microsoft.com/office/powerpoint/2010/main" Requires="p14">
+        <mc:AlternateContent xmlns:mc="http://schemas.openxmlformats.org/markup-compatibility/2006" xmlns:p14="http://schemas.microsoft.com/office/powerpoint/2010/main">
+          <mc:Choice Requires="p14">
             <p:contentPart p14:bwMode="auto" r:id="rId131">
               <p14:nvContentPartPr>
                 <p14:cNvPr id="104" name="Ink 103">
@@ -15776,7 +16088,7 @@
               </p14:xfrm>
             </p:contentPart>
           </mc:Choice>
-          <mc:Fallback>
+          <mc:Fallback xmlns="">
             <p:pic>
               <p:nvPicPr>
                 <p:cNvPr id="104" name="Ink 103">
@@ -15807,8 +16119,8 @@
             </p:pic>
           </mc:Fallback>
         </mc:AlternateContent>
-        <mc:AlternateContent xmlns:mc="http://schemas.openxmlformats.org/markup-compatibility/2006">
-          <mc:Choice xmlns:p14="http://schemas.microsoft.com/office/powerpoint/2010/main" Requires="p14">
+        <mc:AlternateContent xmlns:mc="http://schemas.openxmlformats.org/markup-compatibility/2006" xmlns:p14="http://schemas.microsoft.com/office/powerpoint/2010/main">
+          <mc:Choice Requires="p14">
             <p:contentPart p14:bwMode="auto" r:id="rId133">
               <p14:nvContentPartPr>
                 <p14:cNvPr id="105" name="Ink 104">
@@ -15827,7 +16139,7 @@
               </p14:xfrm>
             </p:contentPart>
           </mc:Choice>
-          <mc:Fallback>
+          <mc:Fallback xmlns="">
             <p:pic>
               <p:nvPicPr>
                 <p:cNvPr id="105" name="Ink 104">
@@ -15858,8 +16170,8 @@
             </p:pic>
           </mc:Fallback>
         </mc:AlternateContent>
-        <mc:AlternateContent xmlns:mc="http://schemas.openxmlformats.org/markup-compatibility/2006">
-          <mc:Choice xmlns:p14="http://schemas.microsoft.com/office/powerpoint/2010/main" Requires="p14">
+        <mc:AlternateContent xmlns:mc="http://schemas.openxmlformats.org/markup-compatibility/2006" xmlns:p14="http://schemas.microsoft.com/office/powerpoint/2010/main">
+          <mc:Choice Requires="p14">
             <p:contentPart p14:bwMode="auto" r:id="rId135">
               <p14:nvContentPartPr>
                 <p14:cNvPr id="106" name="Ink 105">
@@ -15878,7 +16190,7 @@
               </p14:xfrm>
             </p:contentPart>
           </mc:Choice>
-          <mc:Fallback>
+          <mc:Fallback xmlns="">
             <p:pic>
               <p:nvPicPr>
                 <p:cNvPr id="106" name="Ink 105">
@@ -15910,8 +16222,8 @@
           </mc:Fallback>
         </mc:AlternateContent>
       </p:grpSp>
-      <mc:AlternateContent xmlns:mc="http://schemas.openxmlformats.org/markup-compatibility/2006">
-        <mc:Choice xmlns:p14="http://schemas.microsoft.com/office/powerpoint/2010/main" Requires="p14">
+      <mc:AlternateContent xmlns:mc="http://schemas.openxmlformats.org/markup-compatibility/2006" xmlns:p14="http://schemas.microsoft.com/office/powerpoint/2010/main">
+        <mc:Choice Requires="p14">
           <p:contentPart p14:bwMode="auto" r:id="rId137">
             <p14:nvContentPartPr>
               <p14:cNvPr id="109" name="Ink 108">
@@ -15930,7 +16242,7 @@
             </p14:xfrm>
           </p:contentPart>
         </mc:Choice>
-        <mc:Fallback>
+        <mc:Fallback xmlns="">
           <p:pic>
             <p:nvPicPr>
               <p:cNvPr id="109" name="Ink 108">
@@ -15961,8 +16273,8 @@
           </p:pic>
         </mc:Fallback>
       </mc:AlternateContent>
-      <mc:AlternateContent xmlns:mc="http://schemas.openxmlformats.org/markup-compatibility/2006">
-        <mc:Choice xmlns:p14="http://schemas.microsoft.com/office/powerpoint/2010/main" Requires="p14">
+      <mc:AlternateContent xmlns:mc="http://schemas.openxmlformats.org/markup-compatibility/2006" xmlns:p14="http://schemas.microsoft.com/office/powerpoint/2010/main">
+        <mc:Choice Requires="p14">
           <p:contentPart p14:bwMode="auto" r:id="rId139">
             <p14:nvContentPartPr>
               <p14:cNvPr id="111" name="Ink 110">
@@ -15981,7 +16293,7 @@
             </p14:xfrm>
           </p:contentPart>
         </mc:Choice>
-        <mc:Fallback>
+        <mc:Fallback xmlns="">
           <p:pic>
             <p:nvPicPr>
               <p:cNvPr id="111" name="Ink 110">
@@ -16012,8 +16324,8 @@
           </p:pic>
         </mc:Fallback>
       </mc:AlternateContent>
-      <mc:AlternateContent xmlns:mc="http://schemas.openxmlformats.org/markup-compatibility/2006">
-        <mc:Choice xmlns:p14="http://schemas.microsoft.com/office/powerpoint/2010/main" Requires="p14">
+      <mc:AlternateContent xmlns:mc="http://schemas.openxmlformats.org/markup-compatibility/2006" xmlns:p14="http://schemas.microsoft.com/office/powerpoint/2010/main">
+        <mc:Choice Requires="p14">
           <p:contentPart p14:bwMode="auto" r:id="rId141">
             <p14:nvContentPartPr>
               <p14:cNvPr id="112" name="Ink 111">
@@ -16032,7 +16344,7 @@
             </p14:xfrm>
           </p:contentPart>
         </mc:Choice>
-        <mc:Fallback>
+        <mc:Fallback xmlns="">
           <p:pic>
             <p:nvPicPr>
               <p:cNvPr id="112" name="Ink 111">
@@ -16063,8 +16375,8 @@
           </p:pic>
         </mc:Fallback>
       </mc:AlternateContent>
-      <mc:AlternateContent xmlns:mc="http://schemas.openxmlformats.org/markup-compatibility/2006">
-        <mc:Choice xmlns:p14="http://schemas.microsoft.com/office/powerpoint/2010/main" Requires="p14">
+      <mc:AlternateContent xmlns:mc="http://schemas.openxmlformats.org/markup-compatibility/2006" xmlns:p14="http://schemas.microsoft.com/office/powerpoint/2010/main">
+        <mc:Choice Requires="p14">
           <p:contentPart p14:bwMode="auto" r:id="rId143">
             <p14:nvContentPartPr>
               <p14:cNvPr id="113" name="Ink 112">
@@ -16083,7 +16395,7 @@
             </p14:xfrm>
           </p:contentPart>
         </mc:Choice>
-        <mc:Fallback>
+        <mc:Fallback xmlns="">
           <p:pic>
             <p:nvPicPr>
               <p:cNvPr id="113" name="Ink 112">
@@ -16134,8 +16446,8 @@
             <a:chExt cx="1483920" cy="499680"/>
           </a:xfrm>
         </p:grpSpPr>
-        <mc:AlternateContent xmlns:mc="http://schemas.openxmlformats.org/markup-compatibility/2006">
-          <mc:Choice xmlns:p14="http://schemas.microsoft.com/office/powerpoint/2010/main" Requires="p14">
+        <mc:AlternateContent xmlns:mc="http://schemas.openxmlformats.org/markup-compatibility/2006" xmlns:p14="http://schemas.microsoft.com/office/powerpoint/2010/main">
+          <mc:Choice Requires="p14">
             <p:contentPart p14:bwMode="auto" r:id="rId145">
               <p14:nvContentPartPr>
                 <p14:cNvPr id="55" name="Ink 54">
@@ -16154,7 +16466,7 @@
               </p14:xfrm>
             </p:contentPart>
           </mc:Choice>
-          <mc:Fallback>
+          <mc:Fallback xmlns="">
             <p:pic>
               <p:nvPicPr>
                 <p:cNvPr id="55" name="Ink 54">
@@ -16185,8 +16497,8 @@
             </p:pic>
           </mc:Fallback>
         </mc:AlternateContent>
-        <mc:AlternateContent xmlns:mc="http://schemas.openxmlformats.org/markup-compatibility/2006">
-          <mc:Choice xmlns:p14="http://schemas.microsoft.com/office/powerpoint/2010/main" Requires="p14">
+        <mc:AlternateContent xmlns:mc="http://schemas.openxmlformats.org/markup-compatibility/2006" xmlns:p14="http://schemas.microsoft.com/office/powerpoint/2010/main">
+          <mc:Choice Requires="p14">
             <p:contentPart p14:bwMode="auto" r:id="rId147">
               <p14:nvContentPartPr>
                 <p14:cNvPr id="56" name="Ink 55">
@@ -16205,7 +16517,7 @@
               </p14:xfrm>
             </p:contentPart>
           </mc:Choice>
-          <mc:Fallback>
+          <mc:Fallback xmlns="">
             <p:pic>
               <p:nvPicPr>
                 <p:cNvPr id="56" name="Ink 55">
@@ -16236,8 +16548,8 @@
             </p:pic>
           </mc:Fallback>
         </mc:AlternateContent>
-        <mc:AlternateContent xmlns:mc="http://schemas.openxmlformats.org/markup-compatibility/2006">
-          <mc:Choice xmlns:p14="http://schemas.microsoft.com/office/powerpoint/2010/main" Requires="p14">
+        <mc:AlternateContent xmlns:mc="http://schemas.openxmlformats.org/markup-compatibility/2006" xmlns:p14="http://schemas.microsoft.com/office/powerpoint/2010/main">
+          <mc:Choice Requires="p14">
             <p:contentPart p14:bwMode="auto" r:id="rId149">
               <p14:nvContentPartPr>
                 <p14:cNvPr id="57" name="Ink 56">
@@ -16256,7 +16568,7 @@
               </p14:xfrm>
             </p:contentPart>
           </mc:Choice>
-          <mc:Fallback>
+          <mc:Fallback xmlns="">
             <p:pic>
               <p:nvPicPr>
                 <p:cNvPr id="57" name="Ink 56">
@@ -16287,8 +16599,8 @@
             </p:pic>
           </mc:Fallback>
         </mc:AlternateContent>
-        <mc:AlternateContent xmlns:mc="http://schemas.openxmlformats.org/markup-compatibility/2006">
-          <mc:Choice xmlns:p14="http://schemas.microsoft.com/office/powerpoint/2010/main" Requires="p14">
+        <mc:AlternateContent xmlns:mc="http://schemas.openxmlformats.org/markup-compatibility/2006" xmlns:p14="http://schemas.microsoft.com/office/powerpoint/2010/main">
+          <mc:Choice Requires="p14">
             <p:contentPart p14:bwMode="auto" r:id="rId151">
               <p14:nvContentPartPr>
                 <p14:cNvPr id="58" name="Ink 57">
@@ -16307,7 +16619,7 @@
               </p14:xfrm>
             </p:contentPart>
           </mc:Choice>
-          <mc:Fallback>
+          <mc:Fallback xmlns="">
             <p:pic>
               <p:nvPicPr>
                 <p:cNvPr id="58" name="Ink 57">
@@ -16338,8 +16650,8 @@
             </p:pic>
           </mc:Fallback>
         </mc:AlternateContent>
-        <mc:AlternateContent xmlns:mc="http://schemas.openxmlformats.org/markup-compatibility/2006">
-          <mc:Choice xmlns:p14="http://schemas.microsoft.com/office/powerpoint/2010/main" Requires="p14">
+        <mc:AlternateContent xmlns:mc="http://schemas.openxmlformats.org/markup-compatibility/2006" xmlns:p14="http://schemas.microsoft.com/office/powerpoint/2010/main">
+          <mc:Choice Requires="p14">
             <p:contentPart p14:bwMode="auto" r:id="rId153">
               <p14:nvContentPartPr>
                 <p14:cNvPr id="59" name="Ink 58">
@@ -16358,7 +16670,7 @@
               </p14:xfrm>
             </p:contentPart>
           </mc:Choice>
-          <mc:Fallback>
+          <mc:Fallback xmlns="">
             <p:pic>
               <p:nvPicPr>
                 <p:cNvPr id="59" name="Ink 58">
@@ -16389,8 +16701,8 @@
             </p:pic>
           </mc:Fallback>
         </mc:AlternateContent>
-        <mc:AlternateContent xmlns:mc="http://schemas.openxmlformats.org/markup-compatibility/2006">
-          <mc:Choice xmlns:p14="http://schemas.microsoft.com/office/powerpoint/2010/main" Requires="p14">
+        <mc:AlternateContent xmlns:mc="http://schemas.openxmlformats.org/markup-compatibility/2006" xmlns:p14="http://schemas.microsoft.com/office/powerpoint/2010/main">
+          <mc:Choice Requires="p14">
             <p:contentPart p14:bwMode="auto" r:id="rId155">
               <p14:nvContentPartPr>
                 <p14:cNvPr id="60" name="Ink 59">
@@ -16409,7 +16721,7 @@
               </p14:xfrm>
             </p:contentPart>
           </mc:Choice>
-          <mc:Fallback>
+          <mc:Fallback xmlns="">
             <p:pic>
               <p:nvPicPr>
                 <p:cNvPr id="60" name="Ink 59">
@@ -16440,8 +16752,8 @@
             </p:pic>
           </mc:Fallback>
         </mc:AlternateContent>
-        <mc:AlternateContent xmlns:mc="http://schemas.openxmlformats.org/markup-compatibility/2006">
-          <mc:Choice xmlns:p14="http://schemas.microsoft.com/office/powerpoint/2010/main" Requires="p14">
+        <mc:AlternateContent xmlns:mc="http://schemas.openxmlformats.org/markup-compatibility/2006" xmlns:p14="http://schemas.microsoft.com/office/powerpoint/2010/main">
+          <mc:Choice Requires="p14">
             <p:contentPart p14:bwMode="auto" r:id="rId156">
               <p14:nvContentPartPr>
                 <p14:cNvPr id="61" name="Ink 60">
@@ -16460,7 +16772,7 @@
               </p14:xfrm>
             </p:contentPart>
           </mc:Choice>
-          <mc:Fallback>
+          <mc:Fallback xmlns="">
             <p:pic>
               <p:nvPicPr>
                 <p:cNvPr id="61" name="Ink 60">
@@ -16491,8 +16803,8 @@
             </p:pic>
           </mc:Fallback>
         </mc:AlternateContent>
-        <mc:AlternateContent xmlns:mc="http://schemas.openxmlformats.org/markup-compatibility/2006">
-          <mc:Choice xmlns:p14="http://schemas.microsoft.com/office/powerpoint/2010/main" Requires="p14">
+        <mc:AlternateContent xmlns:mc="http://schemas.openxmlformats.org/markup-compatibility/2006" xmlns:p14="http://schemas.microsoft.com/office/powerpoint/2010/main">
+          <mc:Choice Requires="p14">
             <p:contentPart p14:bwMode="auto" r:id="rId157">
               <p14:nvContentPartPr>
                 <p14:cNvPr id="62" name="Ink 61">
@@ -16511,7 +16823,7 @@
               </p14:xfrm>
             </p:contentPart>
           </mc:Choice>
-          <mc:Fallback>
+          <mc:Fallback xmlns="">
             <p:pic>
               <p:nvPicPr>
                 <p:cNvPr id="62" name="Ink 61">
@@ -16542,8 +16854,8 @@
             </p:pic>
           </mc:Fallback>
         </mc:AlternateContent>
-        <mc:AlternateContent xmlns:mc="http://schemas.openxmlformats.org/markup-compatibility/2006">
-          <mc:Choice xmlns:p14="http://schemas.microsoft.com/office/powerpoint/2010/main" Requires="p14">
+        <mc:AlternateContent xmlns:mc="http://schemas.openxmlformats.org/markup-compatibility/2006" xmlns:p14="http://schemas.microsoft.com/office/powerpoint/2010/main">
+          <mc:Choice Requires="p14">
             <p:contentPart p14:bwMode="auto" r:id="rId159">
               <p14:nvContentPartPr>
                 <p14:cNvPr id="114" name="Ink 113">
@@ -16562,7 +16874,7 @@
               </p14:xfrm>
             </p:contentPart>
           </mc:Choice>
-          <mc:Fallback>
+          <mc:Fallback xmlns="">
             <p:pic>
               <p:nvPicPr>
                 <p:cNvPr id="114" name="Ink 113">
@@ -16593,8 +16905,8 @@
             </p:pic>
           </mc:Fallback>
         </mc:AlternateContent>
-        <mc:AlternateContent xmlns:mc="http://schemas.openxmlformats.org/markup-compatibility/2006">
-          <mc:Choice xmlns:p14="http://schemas.microsoft.com/office/powerpoint/2010/main" Requires="p14">
+        <mc:AlternateContent xmlns:mc="http://schemas.openxmlformats.org/markup-compatibility/2006" xmlns:p14="http://schemas.microsoft.com/office/powerpoint/2010/main">
+          <mc:Choice Requires="p14">
             <p:contentPart p14:bwMode="auto" r:id="rId161">
               <p14:nvContentPartPr>
                 <p14:cNvPr id="115" name="Ink 114">
@@ -16613,7 +16925,7 @@
               </p14:xfrm>
             </p:contentPart>
           </mc:Choice>
-          <mc:Fallback>
+          <mc:Fallback xmlns="">
             <p:pic>
               <p:nvPicPr>
                 <p:cNvPr id="115" name="Ink 114">
@@ -16644,8 +16956,8 @@
             </p:pic>
           </mc:Fallback>
         </mc:AlternateContent>
-        <mc:AlternateContent xmlns:mc="http://schemas.openxmlformats.org/markup-compatibility/2006">
-          <mc:Choice xmlns:p14="http://schemas.microsoft.com/office/powerpoint/2010/main" Requires="p14">
+        <mc:AlternateContent xmlns:mc="http://schemas.openxmlformats.org/markup-compatibility/2006" xmlns:p14="http://schemas.microsoft.com/office/powerpoint/2010/main">
+          <mc:Choice Requires="p14">
             <p:contentPart p14:bwMode="auto" r:id="rId163">
               <p14:nvContentPartPr>
                 <p14:cNvPr id="116" name="Ink 115">
@@ -16664,7 +16976,7 @@
               </p14:xfrm>
             </p:contentPart>
           </mc:Choice>
-          <mc:Fallback>
+          <mc:Fallback xmlns="">
             <p:pic>
               <p:nvPicPr>
                 <p:cNvPr id="116" name="Ink 115">
@@ -16695,8 +17007,8 @@
             </p:pic>
           </mc:Fallback>
         </mc:AlternateContent>
-        <mc:AlternateContent xmlns:mc="http://schemas.openxmlformats.org/markup-compatibility/2006">
-          <mc:Choice xmlns:p14="http://schemas.microsoft.com/office/powerpoint/2010/main" Requires="p14">
+        <mc:AlternateContent xmlns:mc="http://schemas.openxmlformats.org/markup-compatibility/2006" xmlns:p14="http://schemas.microsoft.com/office/powerpoint/2010/main">
+          <mc:Choice Requires="p14">
             <p:contentPart p14:bwMode="auto" r:id="rId165">
               <p14:nvContentPartPr>
                 <p14:cNvPr id="117" name="Ink 116">
@@ -16715,7 +17027,7 @@
               </p14:xfrm>
             </p:contentPart>
           </mc:Choice>
-          <mc:Fallback>
+          <mc:Fallback xmlns="">
             <p:pic>
               <p:nvPicPr>
                 <p:cNvPr id="117" name="Ink 116">
@@ -16746,8 +17058,8 @@
             </p:pic>
           </mc:Fallback>
         </mc:AlternateContent>
-        <mc:AlternateContent xmlns:mc="http://schemas.openxmlformats.org/markup-compatibility/2006">
-          <mc:Choice xmlns:p14="http://schemas.microsoft.com/office/powerpoint/2010/main" Requires="p14">
+        <mc:AlternateContent xmlns:mc="http://schemas.openxmlformats.org/markup-compatibility/2006" xmlns:p14="http://schemas.microsoft.com/office/powerpoint/2010/main">
+          <mc:Choice Requires="p14">
             <p:contentPart p14:bwMode="auto" r:id="rId167">
               <p14:nvContentPartPr>
                 <p14:cNvPr id="118" name="Ink 117">
@@ -16766,7 +17078,7 @@
               </p14:xfrm>
             </p:contentPart>
           </mc:Choice>
-          <mc:Fallback>
+          <mc:Fallback xmlns="">
             <p:pic>
               <p:nvPicPr>
                 <p:cNvPr id="118" name="Ink 117">
@@ -16818,8 +17130,8 @@
             <a:chExt cx="1992600" cy="799200"/>
           </a:xfrm>
         </p:grpSpPr>
-        <mc:AlternateContent xmlns:mc="http://schemas.openxmlformats.org/markup-compatibility/2006">
-          <mc:Choice xmlns:p14="http://schemas.microsoft.com/office/powerpoint/2010/main" Requires="p14">
+        <mc:AlternateContent xmlns:mc="http://schemas.openxmlformats.org/markup-compatibility/2006" xmlns:p14="http://schemas.microsoft.com/office/powerpoint/2010/main">
+          <mc:Choice Requires="p14">
             <p:contentPart p14:bwMode="auto" r:id="rId169">
               <p14:nvContentPartPr>
                 <p14:cNvPr id="120" name="Ink 119">
@@ -16838,7 +17150,7 @@
               </p14:xfrm>
             </p:contentPart>
           </mc:Choice>
-          <mc:Fallback>
+          <mc:Fallback xmlns="">
             <p:pic>
               <p:nvPicPr>
                 <p:cNvPr id="120" name="Ink 119">
@@ -16869,8 +17181,8 @@
             </p:pic>
           </mc:Fallback>
         </mc:AlternateContent>
-        <mc:AlternateContent xmlns:mc="http://schemas.openxmlformats.org/markup-compatibility/2006">
-          <mc:Choice xmlns:p14="http://schemas.microsoft.com/office/powerpoint/2010/main" Requires="p14">
+        <mc:AlternateContent xmlns:mc="http://schemas.openxmlformats.org/markup-compatibility/2006" xmlns:p14="http://schemas.microsoft.com/office/powerpoint/2010/main">
+          <mc:Choice Requires="p14">
             <p:contentPart p14:bwMode="auto" r:id="rId171">
               <p14:nvContentPartPr>
                 <p14:cNvPr id="121" name="Ink 120">
@@ -16889,7 +17201,7 @@
               </p14:xfrm>
             </p:contentPart>
           </mc:Choice>
-          <mc:Fallback>
+          <mc:Fallback xmlns="">
             <p:pic>
               <p:nvPicPr>
                 <p:cNvPr id="121" name="Ink 120">
@@ -16920,8 +17232,8 @@
             </p:pic>
           </mc:Fallback>
         </mc:AlternateContent>
-        <mc:AlternateContent xmlns:mc="http://schemas.openxmlformats.org/markup-compatibility/2006">
-          <mc:Choice xmlns:p14="http://schemas.microsoft.com/office/powerpoint/2010/main" Requires="p14">
+        <mc:AlternateContent xmlns:mc="http://schemas.openxmlformats.org/markup-compatibility/2006" xmlns:p14="http://schemas.microsoft.com/office/powerpoint/2010/main">
+          <mc:Choice Requires="p14">
             <p:contentPart p14:bwMode="auto" r:id="rId173">
               <p14:nvContentPartPr>
                 <p14:cNvPr id="122" name="Ink 121">
@@ -16940,7 +17252,7 @@
               </p14:xfrm>
             </p:contentPart>
           </mc:Choice>
-          <mc:Fallback>
+          <mc:Fallback xmlns="">
             <p:pic>
               <p:nvPicPr>
                 <p:cNvPr id="122" name="Ink 121">
@@ -16971,8 +17283,8 @@
             </p:pic>
           </mc:Fallback>
         </mc:AlternateContent>
-        <mc:AlternateContent xmlns:mc="http://schemas.openxmlformats.org/markup-compatibility/2006">
-          <mc:Choice xmlns:p14="http://schemas.microsoft.com/office/powerpoint/2010/main" Requires="p14">
+        <mc:AlternateContent xmlns:mc="http://schemas.openxmlformats.org/markup-compatibility/2006" xmlns:p14="http://schemas.microsoft.com/office/powerpoint/2010/main">
+          <mc:Choice Requires="p14">
             <p:contentPart p14:bwMode="auto" r:id="rId175">
               <p14:nvContentPartPr>
                 <p14:cNvPr id="123" name="Ink 122">
@@ -16991,7 +17303,7 @@
               </p14:xfrm>
             </p:contentPart>
           </mc:Choice>
-          <mc:Fallback>
+          <mc:Fallback xmlns="">
             <p:pic>
               <p:nvPicPr>
                 <p:cNvPr id="123" name="Ink 122">
@@ -17022,8 +17334,8 @@
             </p:pic>
           </mc:Fallback>
         </mc:AlternateContent>
-        <mc:AlternateContent xmlns:mc="http://schemas.openxmlformats.org/markup-compatibility/2006">
-          <mc:Choice xmlns:p14="http://schemas.microsoft.com/office/powerpoint/2010/main" Requires="p14">
+        <mc:AlternateContent xmlns:mc="http://schemas.openxmlformats.org/markup-compatibility/2006" xmlns:p14="http://schemas.microsoft.com/office/powerpoint/2010/main">
+          <mc:Choice Requires="p14">
             <p:contentPart p14:bwMode="auto" r:id="rId177">
               <p14:nvContentPartPr>
                 <p14:cNvPr id="124" name="Ink 123">
@@ -17042,7 +17354,7 @@
               </p14:xfrm>
             </p:contentPart>
           </mc:Choice>
-          <mc:Fallback>
+          <mc:Fallback xmlns="">
             <p:pic>
               <p:nvPicPr>
                 <p:cNvPr id="124" name="Ink 123">
@@ -17073,8 +17385,8 @@
             </p:pic>
           </mc:Fallback>
         </mc:AlternateContent>
-        <mc:AlternateContent xmlns:mc="http://schemas.openxmlformats.org/markup-compatibility/2006">
-          <mc:Choice xmlns:p14="http://schemas.microsoft.com/office/powerpoint/2010/main" Requires="p14">
+        <mc:AlternateContent xmlns:mc="http://schemas.openxmlformats.org/markup-compatibility/2006" xmlns:p14="http://schemas.microsoft.com/office/powerpoint/2010/main">
+          <mc:Choice Requires="p14">
             <p:contentPart p14:bwMode="auto" r:id="rId179">
               <p14:nvContentPartPr>
                 <p14:cNvPr id="125" name="Ink 124">
@@ -17093,7 +17405,7 @@
               </p14:xfrm>
             </p:contentPart>
           </mc:Choice>
-          <mc:Fallback>
+          <mc:Fallback xmlns="">
             <p:pic>
               <p:nvPicPr>
                 <p:cNvPr id="125" name="Ink 124">
@@ -17124,8 +17436,8 @@
             </p:pic>
           </mc:Fallback>
         </mc:AlternateContent>
-        <mc:AlternateContent xmlns:mc="http://schemas.openxmlformats.org/markup-compatibility/2006">
-          <mc:Choice xmlns:p14="http://schemas.microsoft.com/office/powerpoint/2010/main" Requires="p14">
+        <mc:AlternateContent xmlns:mc="http://schemas.openxmlformats.org/markup-compatibility/2006" xmlns:p14="http://schemas.microsoft.com/office/powerpoint/2010/main">
+          <mc:Choice Requires="p14">
             <p:contentPart p14:bwMode="auto" r:id="rId181">
               <p14:nvContentPartPr>
                 <p14:cNvPr id="126" name="Ink 125">
@@ -17144,7 +17456,7 @@
               </p14:xfrm>
             </p:contentPart>
           </mc:Choice>
-          <mc:Fallback>
+          <mc:Fallback xmlns="">
             <p:pic>
               <p:nvPicPr>
                 <p:cNvPr id="126" name="Ink 125">
@@ -17175,8 +17487,8 @@
             </p:pic>
           </mc:Fallback>
         </mc:AlternateContent>
-        <mc:AlternateContent xmlns:mc="http://schemas.openxmlformats.org/markup-compatibility/2006">
-          <mc:Choice xmlns:p14="http://schemas.microsoft.com/office/powerpoint/2010/main" Requires="p14">
+        <mc:AlternateContent xmlns:mc="http://schemas.openxmlformats.org/markup-compatibility/2006" xmlns:p14="http://schemas.microsoft.com/office/powerpoint/2010/main">
+          <mc:Choice Requires="p14">
             <p:contentPart p14:bwMode="auto" r:id="rId183">
               <p14:nvContentPartPr>
                 <p14:cNvPr id="127" name="Ink 126">
@@ -17195,7 +17507,7 @@
               </p14:xfrm>
             </p:contentPart>
           </mc:Choice>
-          <mc:Fallback>
+          <mc:Fallback xmlns="">
             <p:pic>
               <p:nvPicPr>
                 <p:cNvPr id="127" name="Ink 126">
@@ -17226,8 +17538,8 @@
             </p:pic>
           </mc:Fallback>
         </mc:AlternateContent>
-        <mc:AlternateContent xmlns:mc="http://schemas.openxmlformats.org/markup-compatibility/2006">
-          <mc:Choice xmlns:p14="http://schemas.microsoft.com/office/powerpoint/2010/main" Requires="p14">
+        <mc:AlternateContent xmlns:mc="http://schemas.openxmlformats.org/markup-compatibility/2006" xmlns:p14="http://schemas.microsoft.com/office/powerpoint/2010/main">
+          <mc:Choice Requires="p14">
             <p:contentPart p14:bwMode="auto" r:id="rId185">
               <p14:nvContentPartPr>
                 <p14:cNvPr id="128" name="Ink 127">
@@ -17246,7 +17558,7 @@
               </p14:xfrm>
             </p:contentPart>
           </mc:Choice>
-          <mc:Fallback>
+          <mc:Fallback xmlns="">
             <p:pic>
               <p:nvPicPr>
                 <p:cNvPr id="128" name="Ink 127">
@@ -17277,8 +17589,8 @@
             </p:pic>
           </mc:Fallback>
         </mc:AlternateContent>
-        <mc:AlternateContent xmlns:mc="http://schemas.openxmlformats.org/markup-compatibility/2006">
-          <mc:Choice xmlns:p14="http://schemas.microsoft.com/office/powerpoint/2010/main" Requires="p14">
+        <mc:AlternateContent xmlns:mc="http://schemas.openxmlformats.org/markup-compatibility/2006" xmlns:p14="http://schemas.microsoft.com/office/powerpoint/2010/main">
+          <mc:Choice Requires="p14">
             <p:contentPart p14:bwMode="auto" r:id="rId187">
               <p14:nvContentPartPr>
                 <p14:cNvPr id="129" name="Ink 128">
@@ -17297,7 +17609,7 @@
               </p14:xfrm>
             </p:contentPart>
           </mc:Choice>
-          <mc:Fallback>
+          <mc:Fallback xmlns="">
             <p:pic>
               <p:nvPicPr>
                 <p:cNvPr id="129" name="Ink 128">
@@ -17328,8 +17640,8 @@
             </p:pic>
           </mc:Fallback>
         </mc:AlternateContent>
-        <mc:AlternateContent xmlns:mc="http://schemas.openxmlformats.org/markup-compatibility/2006">
-          <mc:Choice xmlns:p14="http://schemas.microsoft.com/office/powerpoint/2010/main" Requires="p14">
+        <mc:AlternateContent xmlns:mc="http://schemas.openxmlformats.org/markup-compatibility/2006" xmlns:p14="http://schemas.microsoft.com/office/powerpoint/2010/main">
+          <mc:Choice Requires="p14">
             <p:contentPart p14:bwMode="auto" r:id="rId189">
               <p14:nvContentPartPr>
                 <p14:cNvPr id="130" name="Ink 129">
@@ -17348,7 +17660,7 @@
               </p14:xfrm>
             </p:contentPart>
           </mc:Choice>
-          <mc:Fallback>
+          <mc:Fallback xmlns="">
             <p:pic>
               <p:nvPicPr>
                 <p:cNvPr id="130" name="Ink 129">
@@ -17379,8 +17691,8 @@
             </p:pic>
           </mc:Fallback>
         </mc:AlternateContent>
-        <mc:AlternateContent xmlns:mc="http://schemas.openxmlformats.org/markup-compatibility/2006">
-          <mc:Choice xmlns:p14="http://schemas.microsoft.com/office/powerpoint/2010/main" Requires="p14">
+        <mc:AlternateContent xmlns:mc="http://schemas.openxmlformats.org/markup-compatibility/2006" xmlns:p14="http://schemas.microsoft.com/office/powerpoint/2010/main">
+          <mc:Choice Requires="p14">
             <p:contentPart p14:bwMode="auto" r:id="rId191">
               <p14:nvContentPartPr>
                 <p14:cNvPr id="131" name="Ink 130">
@@ -17399,7 +17711,7 @@
               </p14:xfrm>
             </p:contentPart>
           </mc:Choice>
-          <mc:Fallback>
+          <mc:Fallback xmlns="">
             <p:pic>
               <p:nvPicPr>
                 <p:cNvPr id="131" name="Ink 130">
@@ -17430,8 +17742,8 @@
             </p:pic>
           </mc:Fallback>
         </mc:AlternateContent>
-        <mc:AlternateContent xmlns:mc="http://schemas.openxmlformats.org/markup-compatibility/2006">
-          <mc:Choice xmlns:p14="http://schemas.microsoft.com/office/powerpoint/2010/main" Requires="p14">
+        <mc:AlternateContent xmlns:mc="http://schemas.openxmlformats.org/markup-compatibility/2006" xmlns:p14="http://schemas.microsoft.com/office/powerpoint/2010/main">
+          <mc:Choice Requires="p14">
             <p:contentPart p14:bwMode="auto" r:id="rId193">
               <p14:nvContentPartPr>
                 <p14:cNvPr id="132" name="Ink 131">
@@ -17450,7 +17762,7 @@
               </p14:xfrm>
             </p:contentPart>
           </mc:Choice>
-          <mc:Fallback>
+          <mc:Fallback xmlns="">
             <p:pic>
               <p:nvPicPr>
                 <p:cNvPr id="132" name="Ink 131">
@@ -17481,8 +17793,8 @@
             </p:pic>
           </mc:Fallback>
         </mc:AlternateContent>
-        <mc:AlternateContent xmlns:mc="http://schemas.openxmlformats.org/markup-compatibility/2006">
-          <mc:Choice xmlns:p14="http://schemas.microsoft.com/office/powerpoint/2010/main" Requires="p14">
+        <mc:AlternateContent xmlns:mc="http://schemas.openxmlformats.org/markup-compatibility/2006" xmlns:p14="http://schemas.microsoft.com/office/powerpoint/2010/main">
+          <mc:Choice Requires="p14">
             <p:contentPart p14:bwMode="auto" r:id="rId195">
               <p14:nvContentPartPr>
                 <p14:cNvPr id="133" name="Ink 132">
@@ -17501,7 +17813,7 @@
               </p14:xfrm>
             </p:contentPart>
           </mc:Choice>
-          <mc:Fallback>
+          <mc:Fallback xmlns="">
             <p:pic>
               <p:nvPicPr>
                 <p:cNvPr id="133" name="Ink 132">
@@ -17932,8 +18244,8 @@
         </p:blipFill>
         <p:spPr>
           <a:xfrm>
-            <a:off x="237744" y="2218371"/>
-            <a:ext cx="4026311" cy="3462782"/>
+            <a:off x="237744" y="2217869"/>
+            <a:ext cx="3876820" cy="3334214"/>
           </a:xfrm>
           <a:prstGeom prst="rect">
             <a:avLst/>
@@ -17992,7 +18304,7 @@
         </p:blipFill>
         <p:spPr>
           <a:xfrm>
-            <a:off x="5766959" y="2218371"/>
+            <a:off x="5684663" y="2255856"/>
             <a:ext cx="5305229" cy="3334214"/>
           </a:xfrm>
           <a:prstGeom prst="rect">
@@ -18049,7 +18361,7 @@
         </p:nvSpPr>
         <p:spPr>
           <a:xfrm>
-            <a:off x="5766959" y="1928593"/>
+            <a:off x="6781943" y="1910092"/>
             <a:ext cx="2573718" cy="307777"/>
           </a:xfrm>
           <a:prstGeom prst="rect">
@@ -18119,7 +18431,7 @@
         </p:nvSpPr>
         <p:spPr>
           <a:xfrm>
-            <a:off x="237744" y="1309254"/>
+            <a:off x="164592" y="1216175"/>
             <a:ext cx="8720464" cy="369332"/>
           </a:xfrm>
           <a:prstGeom prst="rect">
@@ -18183,206 +18495,6 @@
           <p:cNvPr id="2" name="Title 1">
             <a:extLst>
               <a:ext uri="{FF2B5EF4-FFF2-40B4-BE49-F238E27FC236}">
-                <a16:creationId xmlns:a16="http://schemas.microsoft.com/office/drawing/2014/main" id="{ECF33EB7-5D6F-2256-BE82-9118B3E068E7}"/>
-              </a:ext>
-            </a:extLst>
-          </p:cNvPr>
-          <p:cNvSpPr>
-            <a:spLocks noGrp="1"/>
-          </p:cNvSpPr>
-          <p:nvPr>
-            <p:ph type="title"/>
-          </p:nvPr>
-        </p:nvSpPr>
-        <p:spPr>
-          <a:xfrm>
-            <a:off x="841248" y="841248"/>
-            <a:ext cx="10479024" cy="557784"/>
-          </a:xfrm>
-        </p:spPr>
-        <p:txBody>
-          <a:bodyPr vert="horz" lIns="0" tIns="0" rIns="0" bIns="0" rtlCol="0" anchor="t">
-            <a:normAutofit/>
-          </a:bodyPr>
-          <a:lstStyle/>
-          <a:p>
-            <a:r>
-              <a:rPr lang="en-US" b="1" kern="1200" cap="all" spc="300" baseline="0">
-                <a:latin typeface="+mj-lt"/>
-                <a:ea typeface="+mj-ea"/>
-                <a:cs typeface="+mj-cs"/>
-              </a:rPr>
-              <a:t>Bluetooth Connection to the MCU (Raspberry pI Pico W)</a:t>
-            </a:r>
-          </a:p>
-        </p:txBody>
-      </p:sp>
-      <p:sp>
-        <p:nvSpPr>
-          <p:cNvPr id="7" name="TextBox 6">
-            <a:extLst>
-              <a:ext uri="{FF2B5EF4-FFF2-40B4-BE49-F238E27FC236}">
-                <a16:creationId xmlns:a16="http://schemas.microsoft.com/office/drawing/2014/main" id="{072C7495-36B8-B459-2666-E66BD80BAB09}"/>
-              </a:ext>
-            </a:extLst>
-          </p:cNvPr>
-          <p:cNvSpPr txBox="1"/>
-          <p:nvPr/>
-        </p:nvSpPr>
-        <p:spPr>
-          <a:xfrm>
-            <a:off x="841248" y="1536827"/>
-            <a:ext cx="2862072" cy="4479925"/>
-          </a:xfrm>
-          <a:prstGeom prst="rect">
-            <a:avLst/>
-          </a:prstGeom>
-        </p:spPr>
-        <p:txBody>
-          <a:bodyPr vert="horz" lIns="0" tIns="0" rIns="0" bIns="0" rtlCol="0">
-            <a:normAutofit/>
-          </a:bodyPr>
-          <a:lstStyle/>
-          <a:p>
-            <a:pPr marL="342900" indent="-342900">
-              <a:lnSpc>
-                <a:spcPct val="90000"/>
-              </a:lnSpc>
-              <a:spcAft>
-                <a:spcPts val="1800"/>
-              </a:spcAft>
-              <a:buSzPct val="100000"/>
-              <a:buFont typeface="Arial" panose="020B0604020202020204" pitchFamily="34" charset="0"/>
-              <a:buChar char="•"/>
-            </a:pPr>
-            <a:r>
-              <a:rPr lang="en-US" sz="2000">
-                <a:solidFill>
-                  <a:schemeClr val="tx1">
-                    <a:lumMod val="75000"/>
-                    <a:lumOff val="25000"/>
-                  </a:schemeClr>
-                </a:solidFill>
-              </a:rPr>
-              <a:t>Code to control the onboard led with a Bluetooth terminal on phone</a:t>
-            </a:r>
-          </a:p>
-        </p:txBody>
-      </p:sp>
-      <p:pic>
-        <p:nvPicPr>
-          <p:cNvPr id="6" name="Content Placeholder 5">
-            <a:extLst>
-              <a:ext uri="{FF2B5EF4-FFF2-40B4-BE49-F238E27FC236}">
-                <a16:creationId xmlns:a16="http://schemas.microsoft.com/office/drawing/2014/main" id="{EF9CF004-332D-FEE5-B2E8-CD5C2B579434}"/>
-              </a:ext>
-            </a:extLst>
-          </p:cNvPr>
-          <p:cNvPicPr>
-            <a:picLocks noGrp="1" noChangeAspect="1"/>
-          </p:cNvPicPr>
-          <p:nvPr>
-            <p:ph sz="quarter" idx="14"/>
-          </p:nvPr>
-        </p:nvPicPr>
-        <p:blipFill>
-          <a:blip r:embed="rId2"/>
-          <a:stretch>
-            <a:fillRect/>
-          </a:stretch>
-        </p:blipFill>
-        <p:spPr>
-          <a:xfrm>
-            <a:off x="4727448" y="2005286"/>
-            <a:ext cx="6592824" cy="3543642"/>
-          </a:xfrm>
-          <a:prstGeom prst="rect">
-            <a:avLst/>
-          </a:prstGeom>
-          <a:noFill/>
-        </p:spPr>
-      </p:pic>
-      <p:sp>
-        <p:nvSpPr>
-          <p:cNvPr id="4" name="Slide Number Placeholder 3">
-            <a:extLst>
-              <a:ext uri="{FF2B5EF4-FFF2-40B4-BE49-F238E27FC236}">
-                <a16:creationId xmlns:a16="http://schemas.microsoft.com/office/drawing/2014/main" id="{AED44A32-2D5C-A713-F4A6-07104DAC4C73}"/>
-              </a:ext>
-            </a:extLst>
-          </p:cNvPr>
-          <p:cNvSpPr>
-            <a:spLocks noGrp="1"/>
-          </p:cNvSpPr>
-          <p:nvPr>
-            <p:ph type="sldNum" sz="quarter" idx="11"/>
-          </p:nvPr>
-        </p:nvSpPr>
-        <p:spPr>
-          <a:xfrm>
-            <a:off x="10917936" y="6385422"/>
-            <a:ext cx="843264" cy="288000"/>
-          </a:xfrm>
-        </p:spPr>
-        <p:txBody>
-          <a:bodyPr lIns="0" tIns="0" rIns="0" bIns="0" anchor="ctr">
-            <a:normAutofit/>
-          </a:bodyPr>
-          <a:lstStyle/>
-          <a:p>
-            <a:pPr>
-              <a:spcAft>
-                <a:spcPts val="600"/>
-              </a:spcAft>
-            </a:pPr>
-            <a:fld id="{B67B645E-C5E5-4727-B977-D372A0AA71D9}" type="slidenum">
-              <a:rPr lang="en-US" smtClean="0"/>
-              <a:pPr>
-                <a:spcAft>
-                  <a:spcPts val="600"/>
-                </a:spcAft>
-              </a:pPr>
-              <a:t>8</a:t>
-            </a:fld>
-            <a:endParaRPr lang="en-US"/>
-          </a:p>
-        </p:txBody>
-      </p:sp>
-    </p:spTree>
-    <p:extLst>
-      <p:ext uri="{BB962C8B-B14F-4D97-AF65-F5344CB8AC3E}">
-        <p14:creationId xmlns:p14="http://schemas.microsoft.com/office/powerpoint/2010/main" val="1190285264"/>
-      </p:ext>
-    </p:extLst>
-  </p:cSld>
-  <p:clrMapOvr>
-    <a:masterClrMapping/>
-  </p:clrMapOvr>
-</p:sld>
-</file>
-
-<file path=ppt/slides/slide9.xml><?xml version="1.0" encoding="utf-8"?>
-<p:sld xmlns:a="http://schemas.openxmlformats.org/drawingml/2006/main" xmlns:r="http://schemas.openxmlformats.org/officeDocument/2006/relationships" xmlns:p="http://schemas.openxmlformats.org/presentationml/2006/main">
-  <p:cSld>
-    <p:spTree>
-      <p:nvGrpSpPr>
-        <p:cNvPr id="1" name=""/>
-        <p:cNvGrpSpPr/>
-        <p:nvPr/>
-      </p:nvGrpSpPr>
-      <p:grpSpPr>
-        <a:xfrm>
-          <a:off x="0" y="0"/>
-          <a:ext cx="0" cy="0"/>
-          <a:chOff x="0" y="0"/>
-          <a:chExt cx="0" cy="0"/>
-        </a:xfrm>
-      </p:grpSpPr>
-      <p:sp>
-        <p:nvSpPr>
-          <p:cNvPr id="2" name="Title 1">
-            <a:extLst>
-              <a:ext uri="{FF2B5EF4-FFF2-40B4-BE49-F238E27FC236}">
                 <a16:creationId xmlns:a16="http://schemas.microsoft.com/office/drawing/2014/main" id="{4EDD3279-5ECE-19B2-9505-5DA07CA02DB9}"/>
               </a:ext>
             </a:extLst>
@@ -18435,7 +18547,7 @@
             <a:fld id="{B67B645E-C5E5-4727-B977-D372A0AA71D9}" type="slidenum">
               <a:rPr lang="en-US" smtClean="0"/>
               <a:pPr/>
-              <a:t>9</a:t>
+              <a:t>8</a:t>
             </a:fld>
             <a:endParaRPr lang="en-US" dirty="0"/>
           </a:p>
@@ -18614,6 +18726,156 @@
     <p:extLst>
       <p:ext uri="{BB962C8B-B14F-4D97-AF65-F5344CB8AC3E}">
         <p14:creationId xmlns:p14="http://schemas.microsoft.com/office/powerpoint/2010/main" val="3201343129"/>
+      </p:ext>
+    </p:extLst>
+  </p:cSld>
+  <p:clrMapOvr>
+    <a:masterClrMapping/>
+  </p:clrMapOvr>
+</p:sld>
+</file>
+
+<file path=ppt/slides/slide9.xml><?xml version="1.0" encoding="utf-8"?>
+<p:sld xmlns:a="http://schemas.openxmlformats.org/drawingml/2006/main" xmlns:r="http://schemas.openxmlformats.org/officeDocument/2006/relationships" xmlns:p="http://schemas.openxmlformats.org/presentationml/2006/main">
+  <p:cSld>
+    <p:spTree>
+      <p:nvGrpSpPr>
+        <p:cNvPr id="1" name="">
+          <a:extLst>
+            <a:ext uri="{FF2B5EF4-FFF2-40B4-BE49-F238E27FC236}">
+              <a16:creationId xmlns:a16="http://schemas.microsoft.com/office/drawing/2014/main" id="{D71AB119-0827-0F05-F370-25FD6C3CDBFD}"/>
+            </a:ext>
+          </a:extLst>
+        </p:cNvPr>
+        <p:cNvGrpSpPr/>
+        <p:nvPr/>
+      </p:nvGrpSpPr>
+      <p:grpSpPr>
+        <a:xfrm>
+          <a:off x="0" y="0"/>
+          <a:ext cx="0" cy="0"/>
+          <a:chOff x="0" y="0"/>
+          <a:chExt cx="0" cy="0"/>
+        </a:xfrm>
+      </p:grpSpPr>
+      <p:sp>
+        <p:nvSpPr>
+          <p:cNvPr id="2" name="Title 1">
+            <a:extLst>
+              <a:ext uri="{FF2B5EF4-FFF2-40B4-BE49-F238E27FC236}">
+                <a16:creationId xmlns:a16="http://schemas.microsoft.com/office/drawing/2014/main" id="{DF76BEB7-8EA3-3C43-A53D-A5B93A75C540}"/>
+              </a:ext>
+            </a:extLst>
+          </p:cNvPr>
+          <p:cNvSpPr>
+            <a:spLocks noGrp="1"/>
+          </p:cNvSpPr>
+          <p:nvPr>
+            <p:ph type="title"/>
+          </p:nvPr>
+        </p:nvSpPr>
+        <p:spPr/>
+        <p:txBody>
+          <a:bodyPr/>
+          <a:lstStyle/>
+          <a:p>
+            <a:r>
+              <a:rPr lang="en-US" dirty="0"/>
+              <a:t>Web App</a:t>
+            </a:r>
+          </a:p>
+        </p:txBody>
+      </p:sp>
+      <p:sp>
+        <p:nvSpPr>
+          <p:cNvPr id="3" name="Content Placeholder 2">
+            <a:extLst>
+              <a:ext uri="{FF2B5EF4-FFF2-40B4-BE49-F238E27FC236}">
+                <a16:creationId xmlns:a16="http://schemas.microsoft.com/office/drawing/2014/main" id="{C6EBAF4A-430E-93B3-1CF6-790E933B6BB6}"/>
+              </a:ext>
+            </a:extLst>
+          </p:cNvPr>
+          <p:cNvSpPr>
+            <a:spLocks noGrp="1"/>
+          </p:cNvSpPr>
+          <p:nvPr>
+            <p:ph sz="quarter" idx="13"/>
+          </p:nvPr>
+        </p:nvSpPr>
+        <p:spPr>
+          <a:xfrm>
+            <a:off x="841248" y="1536827"/>
+            <a:ext cx="10076688" cy="4479925"/>
+          </a:xfrm>
+        </p:spPr>
+        <p:txBody>
+          <a:bodyPr/>
+          <a:lstStyle/>
+          <a:p>
+            <a:r>
+              <a:rPr lang="en-US" dirty="0"/>
+              <a:t>Choosing browser based for best portability</a:t>
+            </a:r>
+          </a:p>
+          <a:p>
+            <a:r>
+              <a:rPr lang="en-US" dirty="0"/>
+              <a:t>Using </a:t>
+            </a:r>
+            <a:r>
+              <a:rPr lang="en-US" dirty="0" err="1"/>
+              <a:t>webbluetooth</a:t>
+            </a:r>
+            <a:r>
+              <a:rPr lang="en-US" dirty="0"/>
+              <a:t> with JS</a:t>
+            </a:r>
+          </a:p>
+          <a:p>
+            <a:r>
+              <a:rPr lang="en-US" dirty="0"/>
+              <a:t>Need room to expand easily to more channels</a:t>
+            </a:r>
+          </a:p>
+          <a:p>
+            <a:endParaRPr lang="en-US" dirty="0"/>
+          </a:p>
+        </p:txBody>
+      </p:sp>
+      <p:sp>
+        <p:nvSpPr>
+          <p:cNvPr id="4" name="Slide Number Placeholder 3">
+            <a:extLst>
+              <a:ext uri="{FF2B5EF4-FFF2-40B4-BE49-F238E27FC236}">
+                <a16:creationId xmlns:a16="http://schemas.microsoft.com/office/drawing/2014/main" id="{4B6E13FE-EA4D-8BE9-A86E-14F92820A72A}"/>
+              </a:ext>
+            </a:extLst>
+          </p:cNvPr>
+          <p:cNvSpPr>
+            <a:spLocks noGrp="1"/>
+          </p:cNvSpPr>
+          <p:nvPr>
+            <p:ph type="sldNum" sz="quarter" idx="11"/>
+          </p:nvPr>
+        </p:nvSpPr>
+        <p:spPr/>
+        <p:txBody>
+          <a:bodyPr/>
+          <a:lstStyle/>
+          <a:p>
+            <a:fld id="{B67B645E-C5E5-4727-B977-D372A0AA71D9}" type="slidenum">
+              <a:rPr lang="en-US" smtClean="0"/>
+              <a:pPr/>
+              <a:t>9</a:t>
+            </a:fld>
+            <a:endParaRPr lang="en-US" dirty="0"/>
+          </a:p>
+        </p:txBody>
+      </p:sp>
+    </p:spTree>
+    <p:extLst>
+      <p:ext uri="{BB962C8B-B14F-4D97-AF65-F5344CB8AC3E}">
+        <p14:creationId xmlns:p14="http://schemas.microsoft.com/office/powerpoint/2010/main" val="120760822"/>
       </p:ext>
     </p:extLst>
   </p:cSld>
@@ -19475,26 +19737,6 @@
 </file>
 
 <file path=customXml/item1.xml><?xml version="1.0" encoding="utf-8"?>
-<p:properties xmlns:p="http://schemas.microsoft.com/office/2006/metadata/properties" xmlns:xsi="http://www.w3.org/2001/XMLSchema-instance" xmlns:pc="http://schemas.microsoft.com/office/infopath/2007/PartnerControls">
-  <documentManagement>
-    <MediaServiceKeyPoints xmlns="71af3243-3dd4-4a8d-8c0d-dd76da1f02a5" xsi:nil="true"/>
-    <_ip_UnifiedCompliancePolicyUIAction xmlns="http://schemas.microsoft.com/sharepoint/v3" xsi:nil="true"/>
-    <Image xmlns="71af3243-3dd4-4a8d-8c0d-dd76da1f02a5">
-      <Url xsi:nil="true"/>
-      <Description xsi:nil="true"/>
-    </Image>
-    <Status xmlns="71af3243-3dd4-4a8d-8c0d-dd76da1f02a5">Not started</Status>
-    <Background xmlns="71af3243-3dd4-4a8d-8c0d-dd76da1f02a5">false</Background>
-    <_ip_UnifiedCompliancePolicyProperties xmlns="http://schemas.microsoft.com/sharepoint/v3" xsi:nil="true"/>
-    <ImageTagsTaxHTField xmlns="71af3243-3dd4-4a8d-8c0d-dd76da1f02a5">
-      <Terms xmlns="http://schemas.microsoft.com/office/infopath/2007/PartnerControls"/>
-    </ImageTagsTaxHTField>
-    <TaxCatchAll xmlns="230e9df3-be65-4c73-a93b-d1236ebd677e" xsi:nil="true"/>
-  </documentManagement>
-</p:properties>
-</file>
-
-<file path=customXml/item2.xml><?xml version="1.0" encoding="utf-8"?>
 <ct:contentTypeSchema xmlns:ct="http://schemas.microsoft.com/office/2006/metadata/contentType" xmlns:ma="http://schemas.microsoft.com/office/2006/metadata/properties/metaAttributes" ct:_="" ma:_="" ma:contentTypeName="Document" ma:contentTypeID="0x01010079F111ED35F8CC479449609E8A0923A6" ma:contentTypeVersion="29" ma:contentTypeDescription="Create a new document." ma:contentTypeScope="" ma:versionID="6a914531ae0f23be31da2eba1f3b42a9">
   <xsd:schema xmlns:xsd="http://www.w3.org/2001/XMLSchema" xmlns:xs="http://www.w3.org/2001/XMLSchema" xmlns:p="http://schemas.microsoft.com/office/2006/metadata/properties" xmlns:ns1="http://schemas.microsoft.com/sharepoint/v3" xmlns:ns2="71af3243-3dd4-4a8d-8c0d-dd76da1f02a5" xmlns:ns3="16c05727-aa75-4e4a-9b5f-8a80a1165891" xmlns:ns4="230e9df3-be65-4c73-a93b-d1236ebd677e" targetNamespace="http://schemas.microsoft.com/office/2006/metadata/properties" ma:root="true" ma:fieldsID="ae00154c9e66547f022c4923f88826d6" ns1:_="" ns2:_="" ns3:_="" ns4:_="">
     <xsd:import namespace="http://schemas.microsoft.com/sharepoint/v3"/>
@@ -19806,6 +20048,26 @@
 </ct:contentTypeSchema>
 </file>
 
+<file path=customXml/item2.xml><?xml version="1.0" encoding="utf-8"?>
+<p:properties xmlns:p="http://schemas.microsoft.com/office/2006/metadata/properties" xmlns:xsi="http://www.w3.org/2001/XMLSchema-instance" xmlns:pc="http://schemas.microsoft.com/office/infopath/2007/PartnerControls">
+  <documentManagement>
+    <MediaServiceKeyPoints xmlns="71af3243-3dd4-4a8d-8c0d-dd76da1f02a5" xsi:nil="true"/>
+    <_ip_UnifiedCompliancePolicyUIAction xmlns="http://schemas.microsoft.com/sharepoint/v3" xsi:nil="true"/>
+    <Image xmlns="71af3243-3dd4-4a8d-8c0d-dd76da1f02a5">
+      <Url xsi:nil="true"/>
+      <Description xsi:nil="true"/>
+    </Image>
+    <Status xmlns="71af3243-3dd4-4a8d-8c0d-dd76da1f02a5">Not started</Status>
+    <Background xmlns="71af3243-3dd4-4a8d-8c0d-dd76da1f02a5">false</Background>
+    <_ip_UnifiedCompliancePolicyProperties xmlns="http://schemas.microsoft.com/sharepoint/v3" xsi:nil="true"/>
+    <ImageTagsTaxHTField xmlns="71af3243-3dd4-4a8d-8c0d-dd76da1f02a5">
+      <Terms xmlns="http://schemas.microsoft.com/office/infopath/2007/PartnerControls"/>
+    </ImageTagsTaxHTField>
+    <TaxCatchAll xmlns="230e9df3-be65-4c73-a93b-d1236ebd677e" xsi:nil="true"/>
+  </documentManagement>
+</p:properties>
+</file>
+
 <file path=customXml/item3.xml><?xml version="1.0" encoding="utf-8"?>
 <?mso-contentType ?>
 <FormTemplates xmlns="http://schemas.microsoft.com/sharepoint/v3/contenttype/forms">
@@ -19816,18 +20078,6 @@
 </file>
 
 <file path=customXml/itemProps1.xml><?xml version="1.0" encoding="utf-8"?>
-<ds:datastoreItem xmlns:ds="http://schemas.openxmlformats.org/officeDocument/2006/customXml" ds:itemID="{7B247F30-5811-40C0-99EC-CF53200590BE}">
-  <ds:schemaRefs>
-    <ds:schemaRef ds:uri="230e9df3-be65-4c73-a93b-d1236ebd677e"/>
-    <ds:schemaRef ds:uri="71af3243-3dd4-4a8d-8c0d-dd76da1f02a5"/>
-    <ds:schemaRef ds:uri="http://schemas.microsoft.com/office/2006/metadata/properties"/>
-    <ds:schemaRef ds:uri="http://schemas.microsoft.com/office/infopath/2007/PartnerControls"/>
-    <ds:schemaRef ds:uri="http://schemas.microsoft.com/sharepoint/v3"/>
-  </ds:schemaRefs>
-</ds:datastoreItem>
-</file>
-
-<file path=customXml/itemProps2.xml><?xml version="1.0" encoding="utf-8"?>
 <ds:datastoreItem xmlns:ds="http://schemas.openxmlformats.org/officeDocument/2006/customXml" ds:itemID="{A8837B91-4329-4308-94DA-BB811B5F3092}">
   <ds:schemaRefs>
     <ds:schemaRef ds:uri="http://schemas.microsoft.com/office/2006/metadata/contentType"/>
@@ -19848,6 +20098,18 @@
 </ds:datastoreItem>
 </file>
 
+<file path=customXml/itemProps2.xml><?xml version="1.0" encoding="utf-8"?>
+<ds:datastoreItem xmlns:ds="http://schemas.openxmlformats.org/officeDocument/2006/customXml" ds:itemID="{7B247F30-5811-40C0-99EC-CF53200590BE}">
+  <ds:schemaRefs>
+    <ds:schemaRef ds:uri="230e9df3-be65-4c73-a93b-d1236ebd677e"/>
+    <ds:schemaRef ds:uri="71af3243-3dd4-4a8d-8c0d-dd76da1f02a5"/>
+    <ds:schemaRef ds:uri="http://schemas.microsoft.com/office/2006/metadata/properties"/>
+    <ds:schemaRef ds:uri="http://schemas.microsoft.com/office/infopath/2007/PartnerControls"/>
+    <ds:schemaRef ds:uri="http://schemas.microsoft.com/sharepoint/v3"/>
+  </ds:schemaRefs>
+</ds:datastoreItem>
+</file>
+
 <file path=customXml/itemProps3.xml><?xml version="1.0" encoding="utf-8"?>
 <ds:datastoreItem xmlns:ds="http://schemas.openxmlformats.org/officeDocument/2006/customXml" ds:itemID="{55E72E99-0076-433E-AD3A-575A11FAB73D}">
   <ds:schemaRefs>

--- a/Presentations/Week_7_Presentation.pptx
+++ b/Presentations/Week_7_Presentation.pptx
@@ -5,10 +5,10 @@
     <p:sldMasterId id="2147483648" r:id="rId4"/>
   </p:sldMasterIdLst>
   <p:notesMasterIdLst>
-    <p:notesMasterId r:id="rId24"/>
+    <p:notesMasterId r:id="rId26"/>
   </p:notesMasterIdLst>
   <p:handoutMasterIdLst>
-    <p:handoutMasterId r:id="rId25"/>
+    <p:handoutMasterId r:id="rId27"/>
   </p:handoutMasterIdLst>
   <p:sldIdLst>
     <p:sldId id="305" r:id="rId5"/>
@@ -26,10 +26,12 @@
     <p:sldId id="353" r:id="rId17"/>
     <p:sldId id="352" r:id="rId18"/>
     <p:sldId id="343" r:id="rId19"/>
-    <p:sldId id="345" r:id="rId20"/>
-    <p:sldId id="331" r:id="rId21"/>
-    <p:sldId id="330" r:id="rId22"/>
-    <p:sldId id="318" r:id="rId23"/>
+    <p:sldId id="354" r:id="rId20"/>
+    <p:sldId id="355" r:id="rId21"/>
+    <p:sldId id="345" r:id="rId22"/>
+    <p:sldId id="331" r:id="rId23"/>
+    <p:sldId id="330" r:id="rId24"/>
+    <p:sldId id="318" r:id="rId25"/>
   </p:sldIdLst>
   <p:sldSz cx="12192000" cy="6858000"/>
   <p:notesSz cx="6858000" cy="9144000"/>
@@ -11476,6 +11478,240 @@
   <p:cSld>
     <p:spTree>
       <p:nvGrpSpPr>
+        <p:cNvPr id="1" name=""/>
+        <p:cNvGrpSpPr/>
+        <p:nvPr/>
+      </p:nvGrpSpPr>
+      <p:grpSpPr>
+        <a:xfrm>
+          <a:off x="0" y="0"/>
+          <a:ext cx="0" cy="0"/>
+          <a:chOff x="0" y="0"/>
+          <a:chExt cx="0" cy="0"/>
+        </a:xfrm>
+      </p:grpSpPr>
+      <p:sp>
+        <p:nvSpPr>
+          <p:cNvPr id="2" name="Title 1">
+            <a:extLst>
+              <a:ext uri="{FF2B5EF4-FFF2-40B4-BE49-F238E27FC236}">
+                <a16:creationId xmlns:a16="http://schemas.microsoft.com/office/drawing/2014/main" id="{F8C82EE2-EEFF-C23B-1E0F-BD0F542A90BE}"/>
+              </a:ext>
+            </a:extLst>
+          </p:cNvPr>
+          <p:cNvSpPr>
+            <a:spLocks noGrp="1"/>
+          </p:cNvSpPr>
+          <p:nvPr>
+            <p:ph type="title"/>
+          </p:nvPr>
+        </p:nvSpPr>
+        <p:spPr/>
+        <p:txBody>
+          <a:bodyPr/>
+          <a:lstStyle/>
+          <a:p>
+            <a:r>
+              <a:rPr lang="en-US" dirty="0"/>
+              <a:t>Simulation</a:t>
+            </a:r>
+          </a:p>
+        </p:txBody>
+      </p:sp>
+      <p:pic>
+        <p:nvPicPr>
+          <p:cNvPr id="6" name="Content Placeholder 5" descr="A screenshot of a computer program&#10;&#10;AI-generated content may be incorrect.">
+            <a:extLst>
+              <a:ext uri="{FF2B5EF4-FFF2-40B4-BE49-F238E27FC236}">
+                <a16:creationId xmlns:a16="http://schemas.microsoft.com/office/drawing/2014/main" id="{24907BEB-BC52-D2F7-1119-716AB7BEC0E9}"/>
+              </a:ext>
+            </a:extLst>
+          </p:cNvPr>
+          <p:cNvPicPr>
+            <a:picLocks noGrp="1" noChangeAspect="1"/>
+          </p:cNvPicPr>
+          <p:nvPr>
+            <p:ph sz="quarter" idx="13"/>
+          </p:nvPr>
+        </p:nvPicPr>
+        <p:blipFill>
+          <a:blip r:embed="rId2"/>
+          <a:stretch>
+            <a:fillRect/>
+          </a:stretch>
+        </p:blipFill>
+        <p:spPr>
+          <a:xfrm>
+            <a:off x="1202979" y="1299513"/>
+            <a:ext cx="9312621" cy="4945355"/>
+          </a:xfrm>
+        </p:spPr>
+      </p:pic>
+      <p:sp>
+        <p:nvSpPr>
+          <p:cNvPr id="4" name="Slide Number Placeholder 3">
+            <a:extLst>
+              <a:ext uri="{FF2B5EF4-FFF2-40B4-BE49-F238E27FC236}">
+                <a16:creationId xmlns:a16="http://schemas.microsoft.com/office/drawing/2014/main" id="{94F012A9-C0A1-44EF-BD2C-4E37135BD45F}"/>
+              </a:ext>
+            </a:extLst>
+          </p:cNvPr>
+          <p:cNvSpPr>
+            <a:spLocks noGrp="1"/>
+          </p:cNvSpPr>
+          <p:nvPr>
+            <p:ph type="sldNum" sz="quarter" idx="11"/>
+          </p:nvPr>
+        </p:nvSpPr>
+        <p:spPr/>
+        <p:txBody>
+          <a:bodyPr/>
+          <a:lstStyle/>
+          <a:p>
+            <a:fld id="{B67B645E-C5E5-4727-B977-D372A0AA71D9}" type="slidenum">
+              <a:rPr lang="en-US" smtClean="0"/>
+              <a:pPr/>
+              <a:t>16</a:t>
+            </a:fld>
+            <a:endParaRPr lang="en-US" dirty="0"/>
+          </a:p>
+        </p:txBody>
+      </p:sp>
+    </p:spTree>
+    <p:extLst>
+      <p:ext uri="{BB962C8B-B14F-4D97-AF65-F5344CB8AC3E}">
+        <p14:creationId xmlns:p14="http://schemas.microsoft.com/office/powerpoint/2010/main" val="108195520"/>
+      </p:ext>
+    </p:extLst>
+  </p:cSld>
+  <p:clrMapOvr>
+    <a:masterClrMapping/>
+  </p:clrMapOvr>
+</p:sld>
+</file>
+
+<file path=ppt/slides/slide17.xml><?xml version="1.0" encoding="utf-8"?>
+<p:sld xmlns:a="http://schemas.openxmlformats.org/drawingml/2006/main" xmlns:r="http://schemas.openxmlformats.org/officeDocument/2006/relationships" xmlns:p="http://schemas.openxmlformats.org/presentationml/2006/main">
+  <p:cSld>
+    <p:spTree>
+      <p:nvGrpSpPr>
+        <p:cNvPr id="1" name=""/>
+        <p:cNvGrpSpPr/>
+        <p:nvPr/>
+      </p:nvGrpSpPr>
+      <p:grpSpPr>
+        <a:xfrm>
+          <a:off x="0" y="0"/>
+          <a:ext cx="0" cy="0"/>
+          <a:chOff x="0" y="0"/>
+          <a:chExt cx="0" cy="0"/>
+        </a:xfrm>
+      </p:grpSpPr>
+      <p:sp>
+        <p:nvSpPr>
+          <p:cNvPr id="2" name="Title 1">
+            <a:extLst>
+              <a:ext uri="{FF2B5EF4-FFF2-40B4-BE49-F238E27FC236}">
+                <a16:creationId xmlns:a16="http://schemas.microsoft.com/office/drawing/2014/main" id="{76D3C611-5B79-FFE4-35B2-367640840AD0}"/>
+              </a:ext>
+            </a:extLst>
+          </p:cNvPr>
+          <p:cNvSpPr>
+            <a:spLocks noGrp="1"/>
+          </p:cNvSpPr>
+          <p:nvPr>
+            <p:ph type="title"/>
+          </p:nvPr>
+        </p:nvSpPr>
+        <p:spPr/>
+        <p:txBody>
+          <a:bodyPr/>
+          <a:lstStyle/>
+          <a:p>
+            <a:r>
+              <a:rPr lang="en-US" dirty="0"/>
+              <a:t>DC-DC Converter</a:t>
+            </a:r>
+          </a:p>
+        </p:txBody>
+      </p:sp>
+      <p:pic>
+        <p:nvPicPr>
+          <p:cNvPr id="6" name="Content Placeholder 5" descr="A computer chip on a grey surface&#10;&#10;AI-generated content may be incorrect.">
+            <a:extLst>
+              <a:ext uri="{FF2B5EF4-FFF2-40B4-BE49-F238E27FC236}">
+                <a16:creationId xmlns:a16="http://schemas.microsoft.com/office/drawing/2014/main" id="{CF13FD14-684D-9534-ADD5-4602E42C32A9}"/>
+              </a:ext>
+            </a:extLst>
+          </p:cNvPr>
+          <p:cNvPicPr>
+            <a:picLocks noGrp="1" noChangeAspect="1"/>
+          </p:cNvPicPr>
+          <p:nvPr>
+            <p:ph sz="quarter" idx="13"/>
+          </p:nvPr>
+        </p:nvPicPr>
+        <p:blipFill>
+          <a:blip r:embed="rId2"/>
+          <a:stretch>
+            <a:fillRect/>
+          </a:stretch>
+        </p:blipFill>
+        <p:spPr>
+          <a:xfrm>
+            <a:off x="1057719" y="1399032"/>
+            <a:ext cx="10076561" cy="5199890"/>
+          </a:xfrm>
+        </p:spPr>
+      </p:pic>
+      <p:sp>
+        <p:nvSpPr>
+          <p:cNvPr id="4" name="Slide Number Placeholder 3">
+            <a:extLst>
+              <a:ext uri="{FF2B5EF4-FFF2-40B4-BE49-F238E27FC236}">
+                <a16:creationId xmlns:a16="http://schemas.microsoft.com/office/drawing/2014/main" id="{576147E8-EEEA-FD84-15A1-473A51471464}"/>
+              </a:ext>
+            </a:extLst>
+          </p:cNvPr>
+          <p:cNvSpPr>
+            <a:spLocks noGrp="1"/>
+          </p:cNvSpPr>
+          <p:nvPr>
+            <p:ph type="sldNum" sz="quarter" idx="11"/>
+          </p:nvPr>
+        </p:nvSpPr>
+        <p:spPr/>
+        <p:txBody>
+          <a:bodyPr/>
+          <a:lstStyle/>
+          <a:p>
+            <a:fld id="{B67B645E-C5E5-4727-B977-D372A0AA71D9}" type="slidenum">
+              <a:rPr lang="en-US" smtClean="0"/>
+              <a:pPr/>
+              <a:t>17</a:t>
+            </a:fld>
+            <a:endParaRPr lang="en-US" dirty="0"/>
+          </a:p>
+        </p:txBody>
+      </p:sp>
+    </p:spTree>
+    <p:extLst>
+      <p:ext uri="{BB962C8B-B14F-4D97-AF65-F5344CB8AC3E}">
+        <p14:creationId xmlns:p14="http://schemas.microsoft.com/office/powerpoint/2010/main" val="3275669698"/>
+      </p:ext>
+    </p:extLst>
+  </p:cSld>
+  <p:clrMapOvr>
+    <a:masterClrMapping/>
+  </p:clrMapOvr>
+</p:sld>
+</file>
+
+<file path=ppt/slides/slide18.xml><?xml version="1.0" encoding="utf-8"?>
+<p:sld xmlns:a="http://schemas.openxmlformats.org/drawingml/2006/main" xmlns:r="http://schemas.openxmlformats.org/officeDocument/2006/relationships" xmlns:p="http://schemas.openxmlformats.org/presentationml/2006/main">
+  <p:cSld>
+    <p:spTree>
+      <p:nvGrpSpPr>
         <p:cNvPr id="1" name="">
           <a:extLst>
             <a:ext uri="{FF2B5EF4-FFF2-40B4-BE49-F238E27FC236}">
@@ -11579,7 +11815,7 @@
             <a:fld id="{B67B645E-C5E5-4727-B977-D372A0AA71D9}" type="slidenum">
               <a:rPr lang="en-US" smtClean="0"/>
               <a:pPr/>
-              <a:t>16</a:t>
+              <a:t>18</a:t>
             </a:fld>
             <a:endParaRPr lang="en-US" dirty="0"/>
           </a:p>
@@ -11628,7 +11864,7 @@
 </p:sld>
 </file>
 
-<file path=ppt/slides/slide17.xml><?xml version="1.0" encoding="utf-8"?>
+<file path=ppt/slides/slide19.xml><?xml version="1.0" encoding="utf-8"?>
 <p:sld xmlns:a="http://schemas.openxmlformats.org/drawingml/2006/main" xmlns:r="http://schemas.openxmlformats.org/officeDocument/2006/relationships" xmlns:p="http://schemas.openxmlformats.org/presentationml/2006/main">
   <p:cSld>
     <p:spTree>
@@ -11756,7 +11992,7 @@
             <a:fld id="{B67B645E-C5E5-4727-B977-D372A0AA71D9}" type="slidenum">
               <a:rPr lang="en-US" smtClean="0"/>
               <a:pPr/>
-              <a:t>17</a:t>
+              <a:t>19</a:t>
             </a:fld>
             <a:endParaRPr lang="en-US" dirty="0"/>
           </a:p>
@@ -11766,209 +12002,6 @@
     <p:extLst>
       <p:ext uri="{BB962C8B-B14F-4D97-AF65-F5344CB8AC3E}">
         <p14:creationId xmlns:p14="http://schemas.microsoft.com/office/powerpoint/2010/main" val="1809417748"/>
-      </p:ext>
-    </p:extLst>
-  </p:cSld>
-  <p:clrMapOvr>
-    <a:masterClrMapping/>
-  </p:clrMapOvr>
-</p:sld>
-</file>
-
-<file path=ppt/slides/slide18.xml><?xml version="1.0" encoding="utf-8"?>
-<p:sld xmlns:a="http://schemas.openxmlformats.org/drawingml/2006/main" xmlns:r="http://schemas.openxmlformats.org/officeDocument/2006/relationships" xmlns:p="http://schemas.openxmlformats.org/presentationml/2006/main">
-  <p:cSld>
-    <p:spTree>
-      <p:nvGrpSpPr>
-        <p:cNvPr id="1" name=""/>
-        <p:cNvGrpSpPr/>
-        <p:nvPr/>
-      </p:nvGrpSpPr>
-      <p:grpSpPr>
-        <a:xfrm>
-          <a:off x="0" y="0"/>
-          <a:ext cx="0" cy="0"/>
-          <a:chOff x="0" y="0"/>
-          <a:chExt cx="0" cy="0"/>
-        </a:xfrm>
-      </p:grpSpPr>
-      <p:sp>
-        <p:nvSpPr>
-          <p:cNvPr id="2" name="Title 1">
-            <a:extLst>
-              <a:ext uri="{FF2B5EF4-FFF2-40B4-BE49-F238E27FC236}">
-                <a16:creationId xmlns:a16="http://schemas.microsoft.com/office/drawing/2014/main" id="{E178EF87-E3BB-A226-DCCF-2D45CE9BE47B}"/>
-              </a:ext>
-            </a:extLst>
-          </p:cNvPr>
-          <p:cNvSpPr>
-            <a:spLocks noGrp="1"/>
-          </p:cNvSpPr>
-          <p:nvPr>
-            <p:ph type="title"/>
-          </p:nvPr>
-        </p:nvSpPr>
-        <p:spPr/>
-        <p:txBody>
-          <a:bodyPr/>
-          <a:lstStyle/>
-          <a:p>
-            <a:r>
-              <a:rPr lang="en-US" dirty="0"/>
-              <a:t>Immediate Plan</a:t>
-            </a:r>
-          </a:p>
-        </p:txBody>
-      </p:sp>
-      <p:sp>
-        <p:nvSpPr>
-          <p:cNvPr id="3" name="Content Placeholder 2">
-            <a:extLst>
-              <a:ext uri="{FF2B5EF4-FFF2-40B4-BE49-F238E27FC236}">
-                <a16:creationId xmlns:a16="http://schemas.microsoft.com/office/drawing/2014/main" id="{1F4E9115-94A4-A2F8-8B11-947907F62B45}"/>
-              </a:ext>
-            </a:extLst>
-          </p:cNvPr>
-          <p:cNvSpPr>
-            <a:spLocks noGrp="1"/>
-          </p:cNvSpPr>
-          <p:nvPr>
-            <p:ph sz="quarter" idx="13"/>
-          </p:nvPr>
-        </p:nvSpPr>
-        <p:spPr>
-          <a:xfrm>
-            <a:off x="841248" y="1536827"/>
-            <a:ext cx="10479024" cy="4479925"/>
-          </a:xfrm>
-        </p:spPr>
-        <p:txBody>
-          <a:bodyPr/>
-          <a:lstStyle/>
-          <a:p>
-            <a:r>
-              <a:rPr lang="en-US" dirty="0"/>
-              <a:t>Continue schematic and symbol creation</a:t>
-            </a:r>
-          </a:p>
-          <a:p>
-            <a:r>
-              <a:rPr lang="en-US" dirty="0"/>
-              <a:t>Find battery for device</a:t>
-            </a:r>
-          </a:p>
-          <a:p>
-            <a:r>
-              <a:rPr lang="en-US" dirty="0"/>
-              <a:t>Determine board measurements for housing</a:t>
-            </a:r>
-          </a:p>
-          <a:p>
-            <a:r>
-              <a:rPr lang="en-US" dirty="0"/>
-              <a:t>Code pairing and app integration</a:t>
-            </a:r>
-          </a:p>
-          <a:p>
-            <a:r>
-              <a:rPr lang="en-US" dirty="0"/>
-              <a:t>DDS Verification / DDS Breakout Board assembly</a:t>
-            </a:r>
-          </a:p>
-        </p:txBody>
-      </p:sp>
-      <p:sp>
-        <p:nvSpPr>
-          <p:cNvPr id="4" name="Slide Number Placeholder 3">
-            <a:extLst>
-              <a:ext uri="{FF2B5EF4-FFF2-40B4-BE49-F238E27FC236}">
-                <a16:creationId xmlns:a16="http://schemas.microsoft.com/office/drawing/2014/main" id="{305C2303-290B-35FB-A4CD-104764401AD5}"/>
-              </a:ext>
-            </a:extLst>
-          </p:cNvPr>
-          <p:cNvSpPr>
-            <a:spLocks noGrp="1"/>
-          </p:cNvSpPr>
-          <p:nvPr>
-            <p:ph type="sldNum" sz="quarter" idx="11"/>
-          </p:nvPr>
-        </p:nvSpPr>
-        <p:spPr/>
-        <p:txBody>
-          <a:bodyPr/>
-          <a:lstStyle/>
-          <a:p>
-            <a:fld id="{B67B645E-C5E5-4727-B977-D372A0AA71D9}" type="slidenum">
-              <a:rPr lang="en-US" smtClean="0"/>
-              <a:pPr/>
-              <a:t>18</a:t>
-            </a:fld>
-            <a:endParaRPr lang="en-US" dirty="0"/>
-          </a:p>
-        </p:txBody>
-      </p:sp>
-    </p:spTree>
-    <p:extLst>
-      <p:ext uri="{BB962C8B-B14F-4D97-AF65-F5344CB8AC3E}">
-        <p14:creationId xmlns:p14="http://schemas.microsoft.com/office/powerpoint/2010/main" val="3402217194"/>
-      </p:ext>
-    </p:extLst>
-  </p:cSld>
-  <p:clrMapOvr>
-    <a:masterClrMapping/>
-  </p:clrMapOvr>
-</p:sld>
-</file>
-
-<file path=ppt/slides/slide19.xml><?xml version="1.0" encoding="utf-8"?>
-<p:sld xmlns:a="http://schemas.openxmlformats.org/drawingml/2006/main" xmlns:r="http://schemas.openxmlformats.org/officeDocument/2006/relationships" xmlns:p="http://schemas.openxmlformats.org/presentationml/2006/main">
-  <p:cSld>
-    <p:spTree>
-      <p:nvGrpSpPr>
-        <p:cNvPr id="1" name=""/>
-        <p:cNvGrpSpPr/>
-        <p:nvPr/>
-      </p:nvGrpSpPr>
-      <p:grpSpPr>
-        <a:xfrm>
-          <a:off x="0" y="0"/>
-          <a:ext cx="0" cy="0"/>
-          <a:chOff x="0" y="0"/>
-          <a:chExt cx="0" cy="0"/>
-        </a:xfrm>
-      </p:grpSpPr>
-      <p:sp>
-        <p:nvSpPr>
-          <p:cNvPr id="28" name="Title 27">
-            <a:extLst>
-              <a:ext uri="{FF2B5EF4-FFF2-40B4-BE49-F238E27FC236}">
-                <a16:creationId xmlns:a16="http://schemas.microsoft.com/office/drawing/2014/main" id="{CC25EE42-B3D5-AD1E-48BE-54CEFF2E3D79}"/>
-              </a:ext>
-            </a:extLst>
-          </p:cNvPr>
-          <p:cNvSpPr>
-            <a:spLocks noGrp="1"/>
-          </p:cNvSpPr>
-          <p:nvPr>
-            <p:ph type="title"/>
-          </p:nvPr>
-        </p:nvSpPr>
-        <p:spPr/>
-        <p:txBody>
-          <a:bodyPr/>
-          <a:lstStyle/>
-          <a:p>
-            <a:r>
-              <a:rPr lang="en-US" dirty="0"/>
-              <a:t>Questions/Feedback</a:t>
-            </a:r>
-          </a:p>
-        </p:txBody>
-      </p:sp>
-    </p:spTree>
-    <p:extLst>
-      <p:ext uri="{BB962C8B-B14F-4D97-AF65-F5344CB8AC3E}">
-        <p14:creationId xmlns:p14="http://schemas.microsoft.com/office/powerpoint/2010/main" val="1988437062"/>
       </p:ext>
     </p:extLst>
   </p:cSld>
@@ -12106,6 +12139,209 @@
     <p:extLst>
       <p:ext uri="{BB962C8B-B14F-4D97-AF65-F5344CB8AC3E}">
         <p14:creationId xmlns:p14="http://schemas.microsoft.com/office/powerpoint/2010/main" val="4132634631"/>
+      </p:ext>
+    </p:extLst>
+  </p:cSld>
+  <p:clrMapOvr>
+    <a:masterClrMapping/>
+  </p:clrMapOvr>
+</p:sld>
+</file>
+
+<file path=ppt/slides/slide20.xml><?xml version="1.0" encoding="utf-8"?>
+<p:sld xmlns:a="http://schemas.openxmlformats.org/drawingml/2006/main" xmlns:r="http://schemas.openxmlformats.org/officeDocument/2006/relationships" xmlns:p="http://schemas.openxmlformats.org/presentationml/2006/main">
+  <p:cSld>
+    <p:spTree>
+      <p:nvGrpSpPr>
+        <p:cNvPr id="1" name=""/>
+        <p:cNvGrpSpPr/>
+        <p:nvPr/>
+      </p:nvGrpSpPr>
+      <p:grpSpPr>
+        <a:xfrm>
+          <a:off x="0" y="0"/>
+          <a:ext cx="0" cy="0"/>
+          <a:chOff x="0" y="0"/>
+          <a:chExt cx="0" cy="0"/>
+        </a:xfrm>
+      </p:grpSpPr>
+      <p:sp>
+        <p:nvSpPr>
+          <p:cNvPr id="2" name="Title 1">
+            <a:extLst>
+              <a:ext uri="{FF2B5EF4-FFF2-40B4-BE49-F238E27FC236}">
+                <a16:creationId xmlns:a16="http://schemas.microsoft.com/office/drawing/2014/main" id="{E178EF87-E3BB-A226-DCCF-2D45CE9BE47B}"/>
+              </a:ext>
+            </a:extLst>
+          </p:cNvPr>
+          <p:cNvSpPr>
+            <a:spLocks noGrp="1"/>
+          </p:cNvSpPr>
+          <p:nvPr>
+            <p:ph type="title"/>
+          </p:nvPr>
+        </p:nvSpPr>
+        <p:spPr/>
+        <p:txBody>
+          <a:bodyPr/>
+          <a:lstStyle/>
+          <a:p>
+            <a:r>
+              <a:rPr lang="en-US" dirty="0"/>
+              <a:t>Immediate Plan</a:t>
+            </a:r>
+          </a:p>
+        </p:txBody>
+      </p:sp>
+      <p:sp>
+        <p:nvSpPr>
+          <p:cNvPr id="3" name="Content Placeholder 2">
+            <a:extLst>
+              <a:ext uri="{FF2B5EF4-FFF2-40B4-BE49-F238E27FC236}">
+                <a16:creationId xmlns:a16="http://schemas.microsoft.com/office/drawing/2014/main" id="{1F4E9115-94A4-A2F8-8B11-947907F62B45}"/>
+              </a:ext>
+            </a:extLst>
+          </p:cNvPr>
+          <p:cNvSpPr>
+            <a:spLocks noGrp="1"/>
+          </p:cNvSpPr>
+          <p:nvPr>
+            <p:ph sz="quarter" idx="13"/>
+          </p:nvPr>
+        </p:nvSpPr>
+        <p:spPr>
+          <a:xfrm>
+            <a:off x="841248" y="1536827"/>
+            <a:ext cx="10479024" cy="4479925"/>
+          </a:xfrm>
+        </p:spPr>
+        <p:txBody>
+          <a:bodyPr/>
+          <a:lstStyle/>
+          <a:p>
+            <a:r>
+              <a:rPr lang="en-US" dirty="0"/>
+              <a:t>Continue schematic and symbol creation</a:t>
+            </a:r>
+          </a:p>
+          <a:p>
+            <a:r>
+              <a:rPr lang="en-US" dirty="0"/>
+              <a:t>Find battery for device</a:t>
+            </a:r>
+          </a:p>
+          <a:p>
+            <a:r>
+              <a:rPr lang="en-US" dirty="0"/>
+              <a:t>Determine board measurements for housing</a:t>
+            </a:r>
+          </a:p>
+          <a:p>
+            <a:r>
+              <a:rPr lang="en-US" dirty="0"/>
+              <a:t>Code pairing and app integration</a:t>
+            </a:r>
+          </a:p>
+          <a:p>
+            <a:r>
+              <a:rPr lang="en-US" dirty="0"/>
+              <a:t>DDS Verification / DDS Breakout Board assembly</a:t>
+            </a:r>
+          </a:p>
+        </p:txBody>
+      </p:sp>
+      <p:sp>
+        <p:nvSpPr>
+          <p:cNvPr id="4" name="Slide Number Placeholder 3">
+            <a:extLst>
+              <a:ext uri="{FF2B5EF4-FFF2-40B4-BE49-F238E27FC236}">
+                <a16:creationId xmlns:a16="http://schemas.microsoft.com/office/drawing/2014/main" id="{305C2303-290B-35FB-A4CD-104764401AD5}"/>
+              </a:ext>
+            </a:extLst>
+          </p:cNvPr>
+          <p:cNvSpPr>
+            <a:spLocks noGrp="1"/>
+          </p:cNvSpPr>
+          <p:nvPr>
+            <p:ph type="sldNum" sz="quarter" idx="11"/>
+          </p:nvPr>
+        </p:nvSpPr>
+        <p:spPr/>
+        <p:txBody>
+          <a:bodyPr/>
+          <a:lstStyle/>
+          <a:p>
+            <a:fld id="{B67B645E-C5E5-4727-B977-D372A0AA71D9}" type="slidenum">
+              <a:rPr lang="en-US" smtClean="0"/>
+              <a:pPr/>
+              <a:t>20</a:t>
+            </a:fld>
+            <a:endParaRPr lang="en-US" dirty="0"/>
+          </a:p>
+        </p:txBody>
+      </p:sp>
+    </p:spTree>
+    <p:extLst>
+      <p:ext uri="{BB962C8B-B14F-4D97-AF65-F5344CB8AC3E}">
+        <p14:creationId xmlns:p14="http://schemas.microsoft.com/office/powerpoint/2010/main" val="3402217194"/>
+      </p:ext>
+    </p:extLst>
+  </p:cSld>
+  <p:clrMapOvr>
+    <a:masterClrMapping/>
+  </p:clrMapOvr>
+</p:sld>
+</file>
+
+<file path=ppt/slides/slide21.xml><?xml version="1.0" encoding="utf-8"?>
+<p:sld xmlns:a="http://schemas.openxmlformats.org/drawingml/2006/main" xmlns:r="http://schemas.openxmlformats.org/officeDocument/2006/relationships" xmlns:p="http://schemas.openxmlformats.org/presentationml/2006/main">
+  <p:cSld>
+    <p:spTree>
+      <p:nvGrpSpPr>
+        <p:cNvPr id="1" name=""/>
+        <p:cNvGrpSpPr/>
+        <p:nvPr/>
+      </p:nvGrpSpPr>
+      <p:grpSpPr>
+        <a:xfrm>
+          <a:off x="0" y="0"/>
+          <a:ext cx="0" cy="0"/>
+          <a:chOff x="0" y="0"/>
+          <a:chExt cx="0" cy="0"/>
+        </a:xfrm>
+      </p:grpSpPr>
+      <p:sp>
+        <p:nvSpPr>
+          <p:cNvPr id="28" name="Title 27">
+            <a:extLst>
+              <a:ext uri="{FF2B5EF4-FFF2-40B4-BE49-F238E27FC236}">
+                <a16:creationId xmlns:a16="http://schemas.microsoft.com/office/drawing/2014/main" id="{CC25EE42-B3D5-AD1E-48BE-54CEFF2E3D79}"/>
+              </a:ext>
+            </a:extLst>
+          </p:cNvPr>
+          <p:cNvSpPr>
+            <a:spLocks noGrp="1"/>
+          </p:cNvSpPr>
+          <p:nvPr>
+            <p:ph type="title"/>
+          </p:nvPr>
+        </p:nvSpPr>
+        <p:spPr/>
+        <p:txBody>
+          <a:bodyPr/>
+          <a:lstStyle/>
+          <a:p>
+            <a:r>
+              <a:rPr lang="en-US" dirty="0"/>
+              <a:t>Questions/Feedback</a:t>
+            </a:r>
+          </a:p>
+        </p:txBody>
+      </p:sp>
+    </p:spTree>
+    <p:extLst>
+      <p:ext uri="{BB962C8B-B14F-4D97-AF65-F5344CB8AC3E}">
+        <p14:creationId xmlns:p14="http://schemas.microsoft.com/office/powerpoint/2010/main" val="1988437062"/>
       </p:ext>
     </p:extLst>
   </p:cSld>
@@ -19737,6 +19973,26 @@
 </file>
 
 <file path=customXml/item1.xml><?xml version="1.0" encoding="utf-8"?>
+<p:properties xmlns:p="http://schemas.microsoft.com/office/2006/metadata/properties" xmlns:xsi="http://www.w3.org/2001/XMLSchema-instance" xmlns:pc="http://schemas.microsoft.com/office/infopath/2007/PartnerControls">
+  <documentManagement>
+    <MediaServiceKeyPoints xmlns="71af3243-3dd4-4a8d-8c0d-dd76da1f02a5" xsi:nil="true"/>
+    <_ip_UnifiedCompliancePolicyUIAction xmlns="http://schemas.microsoft.com/sharepoint/v3" xsi:nil="true"/>
+    <Image xmlns="71af3243-3dd4-4a8d-8c0d-dd76da1f02a5">
+      <Url xsi:nil="true"/>
+      <Description xsi:nil="true"/>
+    </Image>
+    <Status xmlns="71af3243-3dd4-4a8d-8c0d-dd76da1f02a5">Not started</Status>
+    <Background xmlns="71af3243-3dd4-4a8d-8c0d-dd76da1f02a5">false</Background>
+    <_ip_UnifiedCompliancePolicyProperties xmlns="http://schemas.microsoft.com/sharepoint/v3" xsi:nil="true"/>
+    <ImageTagsTaxHTField xmlns="71af3243-3dd4-4a8d-8c0d-dd76da1f02a5">
+      <Terms xmlns="http://schemas.microsoft.com/office/infopath/2007/PartnerControls"/>
+    </ImageTagsTaxHTField>
+    <TaxCatchAll xmlns="230e9df3-be65-4c73-a93b-d1236ebd677e" xsi:nil="true"/>
+  </documentManagement>
+</p:properties>
+</file>
+
+<file path=customXml/item2.xml><?xml version="1.0" encoding="utf-8"?>
 <ct:contentTypeSchema xmlns:ct="http://schemas.microsoft.com/office/2006/metadata/contentType" xmlns:ma="http://schemas.microsoft.com/office/2006/metadata/properties/metaAttributes" ct:_="" ma:_="" ma:contentTypeName="Document" ma:contentTypeID="0x01010079F111ED35F8CC479449609E8A0923A6" ma:contentTypeVersion="29" ma:contentTypeDescription="Create a new document." ma:contentTypeScope="" ma:versionID="6a914531ae0f23be31da2eba1f3b42a9">
   <xsd:schema xmlns:xsd="http://www.w3.org/2001/XMLSchema" xmlns:xs="http://www.w3.org/2001/XMLSchema" xmlns:p="http://schemas.microsoft.com/office/2006/metadata/properties" xmlns:ns1="http://schemas.microsoft.com/sharepoint/v3" xmlns:ns2="71af3243-3dd4-4a8d-8c0d-dd76da1f02a5" xmlns:ns3="16c05727-aa75-4e4a-9b5f-8a80a1165891" xmlns:ns4="230e9df3-be65-4c73-a93b-d1236ebd677e" targetNamespace="http://schemas.microsoft.com/office/2006/metadata/properties" ma:root="true" ma:fieldsID="ae00154c9e66547f022c4923f88826d6" ns1:_="" ns2:_="" ns3:_="" ns4:_="">
     <xsd:import namespace="http://schemas.microsoft.com/sharepoint/v3"/>
@@ -20048,26 +20304,6 @@
 </ct:contentTypeSchema>
 </file>
 
-<file path=customXml/item2.xml><?xml version="1.0" encoding="utf-8"?>
-<p:properties xmlns:p="http://schemas.microsoft.com/office/2006/metadata/properties" xmlns:xsi="http://www.w3.org/2001/XMLSchema-instance" xmlns:pc="http://schemas.microsoft.com/office/infopath/2007/PartnerControls">
-  <documentManagement>
-    <MediaServiceKeyPoints xmlns="71af3243-3dd4-4a8d-8c0d-dd76da1f02a5" xsi:nil="true"/>
-    <_ip_UnifiedCompliancePolicyUIAction xmlns="http://schemas.microsoft.com/sharepoint/v3" xsi:nil="true"/>
-    <Image xmlns="71af3243-3dd4-4a8d-8c0d-dd76da1f02a5">
-      <Url xsi:nil="true"/>
-      <Description xsi:nil="true"/>
-    </Image>
-    <Status xmlns="71af3243-3dd4-4a8d-8c0d-dd76da1f02a5">Not started</Status>
-    <Background xmlns="71af3243-3dd4-4a8d-8c0d-dd76da1f02a5">false</Background>
-    <_ip_UnifiedCompliancePolicyProperties xmlns="http://schemas.microsoft.com/sharepoint/v3" xsi:nil="true"/>
-    <ImageTagsTaxHTField xmlns="71af3243-3dd4-4a8d-8c0d-dd76da1f02a5">
-      <Terms xmlns="http://schemas.microsoft.com/office/infopath/2007/PartnerControls"/>
-    </ImageTagsTaxHTField>
-    <TaxCatchAll xmlns="230e9df3-be65-4c73-a93b-d1236ebd677e" xsi:nil="true"/>
-  </documentManagement>
-</p:properties>
-</file>
-
 <file path=customXml/item3.xml><?xml version="1.0" encoding="utf-8"?>
 <?mso-contentType ?>
 <FormTemplates xmlns="http://schemas.microsoft.com/sharepoint/v3/contenttype/forms">
@@ -20078,6 +20314,18 @@
 </file>
 
 <file path=customXml/itemProps1.xml><?xml version="1.0" encoding="utf-8"?>
+<ds:datastoreItem xmlns:ds="http://schemas.openxmlformats.org/officeDocument/2006/customXml" ds:itemID="{7B247F30-5811-40C0-99EC-CF53200590BE}">
+  <ds:schemaRefs>
+    <ds:schemaRef ds:uri="230e9df3-be65-4c73-a93b-d1236ebd677e"/>
+    <ds:schemaRef ds:uri="71af3243-3dd4-4a8d-8c0d-dd76da1f02a5"/>
+    <ds:schemaRef ds:uri="http://schemas.microsoft.com/office/2006/metadata/properties"/>
+    <ds:schemaRef ds:uri="http://schemas.microsoft.com/office/infopath/2007/PartnerControls"/>
+    <ds:schemaRef ds:uri="http://schemas.microsoft.com/sharepoint/v3"/>
+  </ds:schemaRefs>
+</ds:datastoreItem>
+</file>
+
+<file path=customXml/itemProps2.xml><?xml version="1.0" encoding="utf-8"?>
 <ds:datastoreItem xmlns:ds="http://schemas.openxmlformats.org/officeDocument/2006/customXml" ds:itemID="{A8837B91-4329-4308-94DA-BB811B5F3092}">
   <ds:schemaRefs>
     <ds:schemaRef ds:uri="http://schemas.microsoft.com/office/2006/metadata/contentType"/>
@@ -20098,18 +20346,6 @@
 </ds:datastoreItem>
 </file>
 
-<file path=customXml/itemProps2.xml><?xml version="1.0" encoding="utf-8"?>
-<ds:datastoreItem xmlns:ds="http://schemas.openxmlformats.org/officeDocument/2006/customXml" ds:itemID="{7B247F30-5811-40C0-99EC-CF53200590BE}">
-  <ds:schemaRefs>
-    <ds:schemaRef ds:uri="230e9df3-be65-4c73-a93b-d1236ebd677e"/>
-    <ds:schemaRef ds:uri="71af3243-3dd4-4a8d-8c0d-dd76da1f02a5"/>
-    <ds:schemaRef ds:uri="http://schemas.microsoft.com/office/2006/metadata/properties"/>
-    <ds:schemaRef ds:uri="http://schemas.microsoft.com/office/infopath/2007/PartnerControls"/>
-    <ds:schemaRef ds:uri="http://schemas.microsoft.com/sharepoint/v3"/>
-  </ds:schemaRefs>
-</ds:datastoreItem>
-</file>
-
 <file path=customXml/itemProps3.xml><?xml version="1.0" encoding="utf-8"?>
 <ds:datastoreItem xmlns:ds="http://schemas.openxmlformats.org/officeDocument/2006/customXml" ds:itemID="{55E72E99-0076-433E-AD3A-575A11FAB73D}">
   <ds:schemaRefs>
